--- a/docs/slides/Modulo 3/dia_4.pptx
+++ b/docs/slides/Modulo 3/dia_4.pptx
@@ -5,17 +5,19 @@
     <p:sldMasterId id="2147483648" r:id="rId1"/>
   </p:sldMasterIdLst>
   <p:sldIdLst>
-    <p:sldId id="256" r:id="rId7"/>
-    <p:sldId id="257" r:id="rId8"/>
-    <p:sldId id="258" r:id="rId9"/>
-    <p:sldId id="259" r:id="rId10"/>
-    <p:sldId id="260" r:id="rId11"/>
-    <p:sldId id="261" r:id="rId12"/>
-    <p:sldId id="262" r:id="rId13"/>
-    <p:sldId id="263" r:id="rId14"/>
-    <p:sldId id="264" r:id="rId15"/>
+    <p:sldId id="256" r:id="rId2"/>
+    <p:sldId id="257" r:id="rId3"/>
+    <p:sldId id="258" r:id="rId4"/>
+    <p:sldId id="259" r:id="rId5"/>
+    <p:sldId id="260" r:id="rId6"/>
+    <p:sldId id="261" r:id="rId7"/>
+    <p:sldId id="262" r:id="rId8"/>
+    <p:sldId id="263" r:id="rId9"/>
+    <p:sldId id="264" r:id="rId10"/>
+    <p:sldId id="265" r:id="rId11"/>
+    <p:sldId id="266" r:id="rId12"/>
   </p:sldIdLst>
-  <p:sldSz cx="12188952" cy="6858000" type="screen4x3"/>
+  <p:sldSz cx="12188825" cy="6858000"/>
   <p:notesSz cx="6858000" cy="9144000"/>
   <p:defaultTextStyle>
     <a:defPPr>
@@ -112,6 +114,22 @@
       </a:defRPr>
     </a:lvl9pPr>
   </p:defaultTextStyle>
+  <p:extLst>
+    <p:ext uri="{EFAFB233-063F-42B5-8137-9DF3F51BA10A}">
+      <p15:sldGuideLst xmlns:p15="http://schemas.microsoft.com/office/powerpoint/2012/main">
+        <p15:guide id="1" orient="horz" pos="2160">
+          <p15:clr>
+            <a:srgbClr val="A4A3A4"/>
+          </p15:clr>
+        </p15:guide>
+        <p15:guide id="2" pos="2880">
+          <p15:clr>
+            <a:srgbClr val="A4A3A4"/>
+          </p15:clr>
+        </p15:guide>
+      </p15:sldGuideLst>
+    </p:ext>
+  </p:extLst>
 </p:presentation>
 </file>
 
@@ -153,10 +171,9 @@
           <a:lstStyle/>
           <a:p>
             <a:r>
-              <a:rPr lang="en-US" smtClean="0"/>
+              <a:rPr lang="en-US"/>
               <a:t>Click to edit Master title style</a:t>
             </a:r>
-            <a:endParaRPr lang="en-US"/>
           </a:p>
         </p:txBody>
       </p:sp>
@@ -272,10 +289,9 @@
           </a:lstStyle>
           <a:p>
             <a:r>
-              <a:rPr lang="en-US" smtClean="0"/>
+              <a:rPr lang="en-US"/>
               <a:t>Click to edit Master subtitle style</a:t>
             </a:r>
-            <a:endParaRPr lang="en-US"/>
           </a:p>
         </p:txBody>
       </p:sp>
@@ -296,7 +312,7 @@
           <a:p>
             <a:fld id="{5BCAD085-E8A6-8845-BD4E-CB4CCA059FC4}" type="datetimeFigureOut">
               <a:rPr lang="en-US" smtClean="0"/>
-              <a:t>1/27/13</a:t>
+              <a:t>4/23/2026</a:t>
             </a:fld>
             <a:endParaRPr lang="en-US"/>
           </a:p>
@@ -338,7 +354,7 @@
           <a:p>
             <a:fld id="{C1FF6DA9-008F-8B48-92A6-B652298478BF}" type="slidenum">
               <a:rPr lang="en-US" smtClean="0"/>
-              <a:t>‹#›</a:t>
+              <a:t>‹Nº›</a:t>
             </a:fld>
             <a:endParaRPr lang="en-US"/>
           </a:p>
@@ -390,10 +406,9 @@
           <a:lstStyle/>
           <a:p>
             <a:r>
-              <a:rPr lang="en-US" smtClean="0"/>
+              <a:rPr lang="en-US"/>
               <a:t>Click to edit Master title style</a:t>
             </a:r>
-            <a:endParaRPr lang="en-US"/>
           </a:p>
         </p:txBody>
       </p:sp>
@@ -414,38 +429,37 @@
           <a:p>
             <a:pPr lvl="0"/>
             <a:r>
-              <a:rPr lang="en-US" smtClean="0"/>
+              <a:rPr lang="en-US"/>
               <a:t>Click to edit Master text styles</a:t>
             </a:r>
           </a:p>
           <a:p>
             <a:pPr lvl="1"/>
             <a:r>
-              <a:rPr lang="en-US" smtClean="0"/>
+              <a:rPr lang="en-US"/>
               <a:t>Second level</a:t>
             </a:r>
           </a:p>
           <a:p>
             <a:pPr lvl="2"/>
             <a:r>
-              <a:rPr lang="en-US" smtClean="0"/>
+              <a:rPr lang="en-US"/>
               <a:t>Third level</a:t>
             </a:r>
           </a:p>
           <a:p>
             <a:pPr lvl="3"/>
             <a:r>
-              <a:rPr lang="en-US" smtClean="0"/>
+              <a:rPr lang="en-US"/>
               <a:t>Fourth level</a:t>
             </a:r>
           </a:p>
           <a:p>
             <a:pPr lvl="4"/>
             <a:r>
-              <a:rPr lang="en-US" smtClean="0"/>
+              <a:rPr lang="en-US"/>
               <a:t>Fifth level</a:t>
             </a:r>
-            <a:endParaRPr lang="en-US"/>
           </a:p>
         </p:txBody>
       </p:sp>
@@ -466,7 +480,7 @@
           <a:p>
             <a:fld id="{5BCAD085-E8A6-8845-BD4E-CB4CCA059FC4}" type="datetimeFigureOut">
               <a:rPr lang="en-US" smtClean="0"/>
-              <a:t>1/27/13</a:t>
+              <a:t>4/23/2026</a:t>
             </a:fld>
             <a:endParaRPr lang="en-US"/>
           </a:p>
@@ -508,7 +522,7 @@
           <a:p>
             <a:fld id="{C1FF6DA9-008F-8B48-92A6-B652298478BF}" type="slidenum">
               <a:rPr lang="en-US" smtClean="0"/>
-              <a:t>‹#›</a:t>
+              <a:t>‹Nº›</a:t>
             </a:fld>
             <a:endParaRPr lang="en-US"/>
           </a:p>
@@ -565,10 +579,9 @@
           <a:lstStyle/>
           <a:p>
             <a:r>
-              <a:rPr lang="en-US" smtClean="0"/>
+              <a:rPr lang="en-US"/>
               <a:t>Click to edit Master title style</a:t>
             </a:r>
-            <a:endParaRPr lang="en-US"/>
           </a:p>
         </p:txBody>
       </p:sp>
@@ -594,38 +607,37 @@
           <a:p>
             <a:pPr lvl="0"/>
             <a:r>
-              <a:rPr lang="en-US" smtClean="0"/>
+              <a:rPr lang="en-US"/>
               <a:t>Click to edit Master text styles</a:t>
             </a:r>
           </a:p>
           <a:p>
             <a:pPr lvl="1"/>
             <a:r>
-              <a:rPr lang="en-US" smtClean="0"/>
+              <a:rPr lang="en-US"/>
               <a:t>Second level</a:t>
             </a:r>
           </a:p>
           <a:p>
             <a:pPr lvl="2"/>
             <a:r>
-              <a:rPr lang="en-US" smtClean="0"/>
+              <a:rPr lang="en-US"/>
               <a:t>Third level</a:t>
             </a:r>
           </a:p>
           <a:p>
             <a:pPr lvl="3"/>
             <a:r>
-              <a:rPr lang="en-US" smtClean="0"/>
+              <a:rPr lang="en-US"/>
               <a:t>Fourth level</a:t>
             </a:r>
           </a:p>
           <a:p>
             <a:pPr lvl="4"/>
             <a:r>
-              <a:rPr lang="en-US" smtClean="0"/>
+              <a:rPr lang="en-US"/>
               <a:t>Fifth level</a:t>
             </a:r>
-            <a:endParaRPr lang="en-US"/>
           </a:p>
         </p:txBody>
       </p:sp>
@@ -646,7 +658,7 @@
           <a:p>
             <a:fld id="{5BCAD085-E8A6-8845-BD4E-CB4CCA059FC4}" type="datetimeFigureOut">
               <a:rPr lang="en-US" smtClean="0"/>
-              <a:t>1/27/13</a:t>
+              <a:t>4/23/2026</a:t>
             </a:fld>
             <a:endParaRPr lang="en-US"/>
           </a:p>
@@ -688,7 +700,7 @@
           <a:p>
             <a:fld id="{C1FF6DA9-008F-8B48-92A6-B652298478BF}" type="slidenum">
               <a:rPr lang="en-US" smtClean="0"/>
-              <a:t>‹#›</a:t>
+              <a:t>‹Nº›</a:t>
             </a:fld>
             <a:endParaRPr lang="en-US"/>
           </a:p>
@@ -740,10 +752,9 @@
           <a:lstStyle/>
           <a:p>
             <a:r>
-              <a:rPr lang="en-US" smtClean="0"/>
+              <a:rPr lang="en-US"/>
               <a:t>Click to edit Master title style</a:t>
             </a:r>
-            <a:endParaRPr lang="en-US"/>
           </a:p>
         </p:txBody>
       </p:sp>
@@ -764,38 +775,37 @@
           <a:p>
             <a:pPr lvl="0"/>
             <a:r>
-              <a:rPr lang="en-US" smtClean="0"/>
+              <a:rPr lang="en-US"/>
               <a:t>Click to edit Master text styles</a:t>
             </a:r>
           </a:p>
           <a:p>
             <a:pPr lvl="1"/>
             <a:r>
-              <a:rPr lang="en-US" smtClean="0"/>
+              <a:rPr lang="en-US"/>
               <a:t>Second level</a:t>
             </a:r>
           </a:p>
           <a:p>
             <a:pPr lvl="2"/>
             <a:r>
-              <a:rPr lang="en-US" smtClean="0"/>
+              <a:rPr lang="en-US"/>
               <a:t>Third level</a:t>
             </a:r>
           </a:p>
           <a:p>
             <a:pPr lvl="3"/>
             <a:r>
-              <a:rPr lang="en-US" smtClean="0"/>
+              <a:rPr lang="en-US"/>
               <a:t>Fourth level</a:t>
             </a:r>
           </a:p>
           <a:p>
             <a:pPr lvl="4"/>
             <a:r>
-              <a:rPr lang="en-US" smtClean="0"/>
+              <a:rPr lang="en-US"/>
               <a:t>Fifth level</a:t>
             </a:r>
-            <a:endParaRPr lang="en-US"/>
           </a:p>
         </p:txBody>
       </p:sp>
@@ -816,7 +826,7 @@
           <a:p>
             <a:fld id="{5BCAD085-E8A6-8845-BD4E-CB4CCA059FC4}" type="datetimeFigureOut">
               <a:rPr lang="en-US" smtClean="0"/>
-              <a:t>1/27/13</a:t>
+              <a:t>4/23/2026</a:t>
             </a:fld>
             <a:endParaRPr lang="en-US"/>
           </a:p>
@@ -858,7 +868,7 @@
           <a:p>
             <a:fld id="{C1FF6DA9-008F-8B48-92A6-B652298478BF}" type="slidenum">
               <a:rPr lang="en-US" smtClean="0"/>
-              <a:t>‹#›</a:t>
+              <a:t>‹Nº›</a:t>
             </a:fld>
             <a:endParaRPr lang="en-US"/>
           </a:p>
@@ -919,10 +929,9 @@
           </a:lstStyle>
           <a:p>
             <a:r>
-              <a:rPr lang="en-US" smtClean="0"/>
+              <a:rPr lang="en-US"/>
               <a:t>Click to edit Master title style</a:t>
             </a:r>
-            <a:endParaRPr lang="en-US"/>
           </a:p>
         </p:txBody>
       </p:sp>
@@ -1039,7 +1048,7 @@
           <a:p>
             <a:pPr lvl="0"/>
             <a:r>
-              <a:rPr lang="en-US" smtClean="0"/>
+              <a:rPr lang="en-US"/>
               <a:t>Click to edit Master text styles</a:t>
             </a:r>
           </a:p>
@@ -1062,7 +1071,7 @@
           <a:p>
             <a:fld id="{5BCAD085-E8A6-8845-BD4E-CB4CCA059FC4}" type="datetimeFigureOut">
               <a:rPr lang="en-US" smtClean="0"/>
-              <a:t>1/27/13</a:t>
+              <a:t>4/23/2026</a:t>
             </a:fld>
             <a:endParaRPr lang="en-US"/>
           </a:p>
@@ -1104,7 +1113,7 @@
           <a:p>
             <a:fld id="{C1FF6DA9-008F-8B48-92A6-B652298478BF}" type="slidenum">
               <a:rPr lang="en-US" smtClean="0"/>
-              <a:t>‹#›</a:t>
+              <a:t>‹Nº›</a:t>
             </a:fld>
             <a:endParaRPr lang="en-US"/>
           </a:p>
@@ -1156,10 +1165,9 @@
           <a:lstStyle/>
           <a:p>
             <a:r>
-              <a:rPr lang="en-US" smtClean="0"/>
+              <a:rPr lang="en-US"/>
               <a:t>Click to edit Master title style</a:t>
             </a:r>
-            <a:endParaRPr lang="en-US"/>
           </a:p>
         </p:txBody>
       </p:sp>
@@ -1213,38 +1221,37 @@
           <a:p>
             <a:pPr lvl="0"/>
             <a:r>
-              <a:rPr lang="en-US" smtClean="0"/>
+              <a:rPr lang="en-US"/>
               <a:t>Click to edit Master text styles</a:t>
             </a:r>
           </a:p>
           <a:p>
             <a:pPr lvl="1"/>
             <a:r>
-              <a:rPr lang="en-US" smtClean="0"/>
+              <a:rPr lang="en-US"/>
               <a:t>Second level</a:t>
             </a:r>
           </a:p>
           <a:p>
             <a:pPr lvl="2"/>
             <a:r>
-              <a:rPr lang="en-US" smtClean="0"/>
+              <a:rPr lang="en-US"/>
               <a:t>Third level</a:t>
             </a:r>
           </a:p>
           <a:p>
             <a:pPr lvl="3"/>
             <a:r>
-              <a:rPr lang="en-US" smtClean="0"/>
+              <a:rPr lang="en-US"/>
               <a:t>Fourth level</a:t>
             </a:r>
           </a:p>
           <a:p>
             <a:pPr lvl="4"/>
             <a:r>
-              <a:rPr lang="en-US" smtClean="0"/>
+              <a:rPr lang="en-US"/>
               <a:t>Fifth level</a:t>
             </a:r>
-            <a:endParaRPr lang="en-US"/>
           </a:p>
         </p:txBody>
       </p:sp>
@@ -1298,38 +1305,37 @@
           <a:p>
             <a:pPr lvl="0"/>
             <a:r>
-              <a:rPr lang="en-US" smtClean="0"/>
+              <a:rPr lang="en-US"/>
               <a:t>Click to edit Master text styles</a:t>
             </a:r>
           </a:p>
           <a:p>
             <a:pPr lvl="1"/>
             <a:r>
-              <a:rPr lang="en-US" smtClean="0"/>
+              <a:rPr lang="en-US"/>
               <a:t>Second level</a:t>
             </a:r>
           </a:p>
           <a:p>
             <a:pPr lvl="2"/>
             <a:r>
-              <a:rPr lang="en-US" smtClean="0"/>
+              <a:rPr lang="en-US"/>
               <a:t>Third level</a:t>
             </a:r>
           </a:p>
           <a:p>
             <a:pPr lvl="3"/>
             <a:r>
-              <a:rPr lang="en-US" smtClean="0"/>
+              <a:rPr lang="en-US"/>
               <a:t>Fourth level</a:t>
             </a:r>
           </a:p>
           <a:p>
             <a:pPr lvl="4"/>
             <a:r>
-              <a:rPr lang="en-US" smtClean="0"/>
+              <a:rPr lang="en-US"/>
               <a:t>Fifth level</a:t>
             </a:r>
-            <a:endParaRPr lang="en-US"/>
           </a:p>
         </p:txBody>
       </p:sp>
@@ -1350,7 +1356,7 @@
           <a:p>
             <a:fld id="{5BCAD085-E8A6-8845-BD4E-CB4CCA059FC4}" type="datetimeFigureOut">
               <a:rPr lang="en-US" smtClean="0"/>
-              <a:t>1/27/13</a:t>
+              <a:t>4/23/2026</a:t>
             </a:fld>
             <a:endParaRPr lang="en-US"/>
           </a:p>
@@ -1392,7 +1398,7 @@
           <a:p>
             <a:fld id="{C1FF6DA9-008F-8B48-92A6-B652298478BF}" type="slidenum">
               <a:rPr lang="en-US" smtClean="0"/>
-              <a:t>‹#›</a:t>
+              <a:t>‹Nº›</a:t>
             </a:fld>
             <a:endParaRPr lang="en-US"/>
           </a:p>
@@ -1448,10 +1454,9 @@
           </a:lstStyle>
           <a:p>
             <a:r>
-              <a:rPr lang="en-US" smtClean="0"/>
+              <a:rPr lang="en-US"/>
               <a:t>Click to edit Master title style</a:t>
             </a:r>
-            <a:endParaRPr lang="en-US"/>
           </a:p>
         </p:txBody>
       </p:sp>
@@ -1514,7 +1519,7 @@
           <a:p>
             <a:pPr lvl="0"/>
             <a:r>
-              <a:rPr lang="en-US" smtClean="0"/>
+              <a:rPr lang="en-US"/>
               <a:t>Click to edit Master text styles</a:t>
             </a:r>
           </a:p>
@@ -1570,38 +1575,37 @@
           <a:p>
             <a:pPr lvl="0"/>
             <a:r>
-              <a:rPr lang="en-US" smtClean="0"/>
+              <a:rPr lang="en-US"/>
               <a:t>Click to edit Master text styles</a:t>
             </a:r>
           </a:p>
           <a:p>
             <a:pPr lvl="1"/>
             <a:r>
-              <a:rPr lang="en-US" smtClean="0"/>
+              <a:rPr lang="en-US"/>
               <a:t>Second level</a:t>
             </a:r>
           </a:p>
           <a:p>
             <a:pPr lvl="2"/>
             <a:r>
-              <a:rPr lang="en-US" smtClean="0"/>
+              <a:rPr lang="en-US"/>
               <a:t>Third level</a:t>
             </a:r>
           </a:p>
           <a:p>
             <a:pPr lvl="3"/>
             <a:r>
-              <a:rPr lang="en-US" smtClean="0"/>
+              <a:rPr lang="en-US"/>
               <a:t>Fourth level</a:t>
             </a:r>
           </a:p>
           <a:p>
             <a:pPr lvl="4"/>
             <a:r>
-              <a:rPr lang="en-US" smtClean="0"/>
+              <a:rPr lang="en-US"/>
               <a:t>Fifth level</a:t>
             </a:r>
-            <a:endParaRPr lang="en-US"/>
           </a:p>
         </p:txBody>
       </p:sp>
@@ -1664,7 +1668,7 @@
           <a:p>
             <a:pPr lvl="0"/>
             <a:r>
-              <a:rPr lang="en-US" smtClean="0"/>
+              <a:rPr lang="en-US"/>
               <a:t>Click to edit Master text styles</a:t>
             </a:r>
           </a:p>
@@ -1720,38 +1724,37 @@
           <a:p>
             <a:pPr lvl="0"/>
             <a:r>
-              <a:rPr lang="en-US" smtClean="0"/>
+              <a:rPr lang="en-US"/>
               <a:t>Click to edit Master text styles</a:t>
             </a:r>
           </a:p>
           <a:p>
             <a:pPr lvl="1"/>
             <a:r>
-              <a:rPr lang="en-US" smtClean="0"/>
+              <a:rPr lang="en-US"/>
               <a:t>Second level</a:t>
             </a:r>
           </a:p>
           <a:p>
             <a:pPr lvl="2"/>
             <a:r>
-              <a:rPr lang="en-US" smtClean="0"/>
+              <a:rPr lang="en-US"/>
               <a:t>Third level</a:t>
             </a:r>
           </a:p>
           <a:p>
             <a:pPr lvl="3"/>
             <a:r>
-              <a:rPr lang="en-US" smtClean="0"/>
+              <a:rPr lang="en-US"/>
               <a:t>Fourth level</a:t>
             </a:r>
           </a:p>
           <a:p>
             <a:pPr lvl="4"/>
             <a:r>
-              <a:rPr lang="en-US" smtClean="0"/>
+              <a:rPr lang="en-US"/>
               <a:t>Fifth level</a:t>
             </a:r>
-            <a:endParaRPr lang="en-US"/>
           </a:p>
         </p:txBody>
       </p:sp>
@@ -1772,7 +1775,7 @@
           <a:p>
             <a:fld id="{5BCAD085-E8A6-8845-BD4E-CB4CCA059FC4}" type="datetimeFigureOut">
               <a:rPr lang="en-US" smtClean="0"/>
-              <a:t>1/27/13</a:t>
+              <a:t>4/23/2026</a:t>
             </a:fld>
             <a:endParaRPr lang="en-US"/>
           </a:p>
@@ -1814,7 +1817,7 @@
           <a:p>
             <a:fld id="{C1FF6DA9-008F-8B48-92A6-B652298478BF}" type="slidenum">
               <a:rPr lang="en-US" smtClean="0"/>
-              <a:t>‹#›</a:t>
+              <a:t>‹Nº›</a:t>
             </a:fld>
             <a:endParaRPr lang="en-US"/>
           </a:p>
@@ -1866,10 +1869,9 @@
           <a:lstStyle/>
           <a:p>
             <a:r>
-              <a:rPr lang="en-US" smtClean="0"/>
+              <a:rPr lang="en-US"/>
               <a:t>Click to edit Master title style</a:t>
             </a:r>
-            <a:endParaRPr lang="en-US"/>
           </a:p>
         </p:txBody>
       </p:sp>
@@ -1890,7 +1892,7 @@
           <a:p>
             <a:fld id="{5BCAD085-E8A6-8845-BD4E-CB4CCA059FC4}" type="datetimeFigureOut">
               <a:rPr lang="en-US" smtClean="0"/>
-              <a:t>1/27/13</a:t>
+              <a:t>4/23/2026</a:t>
             </a:fld>
             <a:endParaRPr lang="en-US"/>
           </a:p>
@@ -1932,7 +1934,7 @@
           <a:p>
             <a:fld id="{C1FF6DA9-008F-8B48-92A6-B652298478BF}" type="slidenum">
               <a:rPr lang="en-US" smtClean="0"/>
-              <a:t>‹#›</a:t>
+              <a:t>‹Nº›</a:t>
             </a:fld>
             <a:endParaRPr lang="en-US"/>
           </a:p>
@@ -1985,7 +1987,7 @@
           <a:p>
             <a:fld id="{5BCAD085-E8A6-8845-BD4E-CB4CCA059FC4}" type="datetimeFigureOut">
               <a:rPr lang="en-US" smtClean="0"/>
-              <a:t>1/27/13</a:t>
+              <a:t>4/23/2026</a:t>
             </a:fld>
             <a:endParaRPr lang="en-US"/>
           </a:p>
@@ -2027,7 +2029,7 @@
           <a:p>
             <a:fld id="{C1FF6DA9-008F-8B48-92A6-B652298478BF}" type="slidenum">
               <a:rPr lang="en-US" smtClean="0"/>
-              <a:t>‹#›</a:t>
+              <a:t>‹Nº›</a:t>
             </a:fld>
             <a:endParaRPr lang="en-US"/>
           </a:p>
@@ -2088,10 +2090,9 @@
           </a:lstStyle>
           <a:p>
             <a:r>
-              <a:rPr lang="en-US" smtClean="0"/>
+              <a:rPr lang="en-US"/>
               <a:t>Click to edit Master title style</a:t>
             </a:r>
-            <a:endParaRPr lang="en-US"/>
           </a:p>
         </p:txBody>
       </p:sp>
@@ -2145,38 +2146,37 @@
           <a:p>
             <a:pPr lvl="0"/>
             <a:r>
-              <a:rPr lang="en-US" smtClean="0"/>
+              <a:rPr lang="en-US"/>
               <a:t>Click to edit Master text styles</a:t>
             </a:r>
           </a:p>
           <a:p>
             <a:pPr lvl="1"/>
             <a:r>
-              <a:rPr lang="en-US" smtClean="0"/>
+              <a:rPr lang="en-US"/>
               <a:t>Second level</a:t>
             </a:r>
           </a:p>
           <a:p>
             <a:pPr lvl="2"/>
             <a:r>
-              <a:rPr lang="en-US" smtClean="0"/>
+              <a:rPr lang="en-US"/>
               <a:t>Third level</a:t>
             </a:r>
           </a:p>
           <a:p>
             <a:pPr lvl="3"/>
             <a:r>
-              <a:rPr lang="en-US" smtClean="0"/>
+              <a:rPr lang="en-US"/>
               <a:t>Fourth level</a:t>
             </a:r>
           </a:p>
           <a:p>
             <a:pPr lvl="4"/>
             <a:r>
-              <a:rPr lang="en-US" smtClean="0"/>
+              <a:rPr lang="en-US"/>
               <a:t>Fifth level</a:t>
             </a:r>
-            <a:endParaRPr lang="en-US"/>
           </a:p>
         </p:txBody>
       </p:sp>
@@ -2239,7 +2239,7 @@
           <a:p>
             <a:pPr lvl="0"/>
             <a:r>
-              <a:rPr lang="en-US" smtClean="0"/>
+              <a:rPr lang="en-US"/>
               <a:t>Click to edit Master text styles</a:t>
             </a:r>
           </a:p>
@@ -2262,7 +2262,7 @@
           <a:p>
             <a:fld id="{5BCAD085-E8A6-8845-BD4E-CB4CCA059FC4}" type="datetimeFigureOut">
               <a:rPr lang="en-US" smtClean="0"/>
-              <a:t>1/27/13</a:t>
+              <a:t>4/23/2026</a:t>
             </a:fld>
             <a:endParaRPr lang="en-US"/>
           </a:p>
@@ -2304,7 +2304,7 @@
           <a:p>
             <a:fld id="{C1FF6DA9-008F-8B48-92A6-B652298478BF}" type="slidenum">
               <a:rPr lang="en-US" smtClean="0"/>
-              <a:t>‹#›</a:t>
+              <a:t>‹Nº›</a:t>
             </a:fld>
             <a:endParaRPr lang="en-US"/>
           </a:p>
@@ -2365,10 +2365,9 @@
           </a:lstStyle>
           <a:p>
             <a:r>
-              <a:rPr lang="en-US" smtClean="0"/>
+              <a:rPr lang="en-US"/>
               <a:t>Click to edit Master title style</a:t>
             </a:r>
-            <a:endParaRPr lang="en-US"/>
           </a:p>
         </p:txBody>
       </p:sp>
@@ -2492,7 +2491,7 @@
           <a:p>
             <a:pPr lvl="0"/>
             <a:r>
-              <a:rPr lang="en-US" smtClean="0"/>
+              <a:rPr lang="en-US"/>
               <a:t>Click to edit Master text styles</a:t>
             </a:r>
           </a:p>
@@ -2515,7 +2514,7 @@
           <a:p>
             <a:fld id="{5BCAD085-E8A6-8845-BD4E-CB4CCA059FC4}" type="datetimeFigureOut">
               <a:rPr lang="en-US" smtClean="0"/>
-              <a:t>1/27/13</a:t>
+              <a:t>4/23/2026</a:t>
             </a:fld>
             <a:endParaRPr lang="en-US"/>
           </a:p>
@@ -2557,7 +2556,7 @@
           <a:p>
             <a:fld id="{C1FF6DA9-008F-8B48-92A6-B652298478BF}" type="slidenum">
               <a:rPr lang="en-US" smtClean="0"/>
-              <a:t>‹#›</a:t>
+              <a:t>‹Nº›</a:t>
             </a:fld>
             <a:endParaRPr lang="en-US"/>
           </a:p>
@@ -2624,10 +2623,9 @@
           <a:lstStyle/>
           <a:p>
             <a:r>
-              <a:rPr lang="en-US" smtClean="0"/>
+              <a:rPr lang="en-US"/>
               <a:t>Click to edit Master title style</a:t>
             </a:r>
-            <a:endParaRPr lang="en-US"/>
           </a:p>
         </p:txBody>
       </p:sp>
@@ -2658,38 +2656,37 @@
           <a:p>
             <a:pPr lvl="0"/>
             <a:r>
-              <a:rPr lang="en-US" smtClean="0"/>
+              <a:rPr lang="en-US"/>
               <a:t>Click to edit Master text styles</a:t>
             </a:r>
           </a:p>
           <a:p>
             <a:pPr lvl="1"/>
             <a:r>
-              <a:rPr lang="en-US" smtClean="0"/>
+              <a:rPr lang="en-US"/>
               <a:t>Second level</a:t>
             </a:r>
           </a:p>
           <a:p>
             <a:pPr lvl="2"/>
             <a:r>
-              <a:rPr lang="en-US" smtClean="0"/>
+              <a:rPr lang="en-US"/>
               <a:t>Third level</a:t>
             </a:r>
           </a:p>
           <a:p>
             <a:pPr lvl="3"/>
             <a:r>
-              <a:rPr lang="en-US" smtClean="0"/>
+              <a:rPr lang="en-US"/>
               <a:t>Fourth level</a:t>
             </a:r>
           </a:p>
           <a:p>
             <a:pPr lvl="4"/>
             <a:r>
-              <a:rPr lang="en-US" smtClean="0"/>
+              <a:rPr lang="en-US"/>
               <a:t>Fifth level</a:t>
             </a:r>
-            <a:endParaRPr lang="en-US"/>
           </a:p>
         </p:txBody>
       </p:sp>
@@ -2728,7 +2725,7 @@
           <a:p>
             <a:fld id="{5BCAD085-E8A6-8845-BD4E-CB4CCA059FC4}" type="datetimeFigureOut">
               <a:rPr lang="en-US" smtClean="0"/>
-              <a:t>1/27/13</a:t>
+              <a:t>4/23/2026</a:t>
             </a:fld>
             <a:endParaRPr lang="en-US"/>
           </a:p>
@@ -2806,7 +2803,7 @@
           <a:p>
             <a:fld id="{C1FF6DA9-008F-8B48-92A6-B652298478BF}" type="slidenum">
               <a:rPr lang="en-US" smtClean="0"/>
-              <a:t>‹#›</a:t>
+              <a:t>‹Nº›</a:t>
             </a:fld>
             <a:endParaRPr lang="en-US"/>
           </a:p>
@@ -3087,7 +3084,7 @@
 </file>
 
 <file path=ppt/slides/slide1.xml><?xml version="1.0" encoding="utf-8"?>
-<p:sld xmlns:a="http://schemas.openxmlformats.org/drawingml/2006/main" xmlns:p="http://schemas.openxmlformats.org/presentationml/2006/main" xmlns:r="http://schemas.openxmlformats.org/officeDocument/2006/relationships">
+<p:sld xmlns:a="http://schemas.openxmlformats.org/drawingml/2006/main" xmlns:r="http://schemas.openxmlformats.org/officeDocument/2006/relationships" xmlns:p="http://schemas.openxmlformats.org/presentationml/2006/main">
   <p:cSld>
     <p:spTree>
       <p:nvGrpSpPr>
@@ -3095,7 +3092,14 @@
         <p:cNvGrpSpPr/>
         <p:nvPr/>
       </p:nvGrpSpPr>
-      <p:grpSpPr/>
+      <p:grpSpPr>
+        <a:xfrm>
+          <a:off x="0" y="0"/>
+          <a:ext cx="0" cy="0"/>
+          <a:chOff x="0" y="0"/>
+          <a:chExt cx="0" cy="0"/>
+        </a:xfrm>
+      </p:grpSpPr>
       <p:sp>
         <p:nvSpPr>
           <p:cNvPr id="2" name="Rectangle 1"/>
@@ -3136,6 +3140,7 @@
           <a:lstStyle/>
           <a:p>
             <a:pPr algn="ctr"/>
+            <a:endParaRPr/>
           </a:p>
         </p:txBody>
       </p:sp>
@@ -3179,6 +3184,7 @@
           <a:lstStyle/>
           <a:p>
             <a:pPr algn="ctr"/>
+            <a:endParaRPr/>
           </a:p>
         </p:txBody>
       </p:sp>
@@ -3296,8 +3302,8 @@
 </p:sld>
 </file>
 
-<file path=ppt/slides/slide2.xml><?xml version="1.0" encoding="utf-8"?>
-<p:sld xmlns:a="http://schemas.openxmlformats.org/drawingml/2006/main" xmlns:p="http://schemas.openxmlformats.org/presentationml/2006/main" xmlns:r="http://schemas.openxmlformats.org/officeDocument/2006/relationships">
+<file path=ppt/slides/slide10.xml><?xml version="1.0" encoding="utf-8"?>
+<p:sld xmlns:a="http://schemas.openxmlformats.org/drawingml/2006/main" xmlns:r="http://schemas.openxmlformats.org/officeDocument/2006/relationships" xmlns:p="http://schemas.openxmlformats.org/presentationml/2006/main">
   <p:cSld>
     <p:spTree>
       <p:nvGrpSpPr>
@@ -3305,7 +3311,14 @@
         <p:cNvGrpSpPr/>
         <p:nvPr/>
       </p:nvGrpSpPr>
-      <p:grpSpPr/>
+      <p:grpSpPr>
+        <a:xfrm>
+          <a:off x="0" y="0"/>
+          <a:ext cx="0" cy="0"/>
+          <a:chOff x="0" y="0"/>
+          <a:chExt cx="0" cy="0"/>
+        </a:xfrm>
+      </p:grpSpPr>
       <p:sp>
         <p:nvSpPr>
           <p:cNvPr id="2" name="Rectangle 1"/>
@@ -3346,6 +3359,7 @@
           <a:lstStyle/>
           <a:p>
             <a:pPr algn="ctr"/>
+            <a:endParaRPr/>
           </a:p>
         </p:txBody>
       </p:sp>
@@ -3378,7 +3392,7 @@
               </a:defRPr>
             </a:pPr>
             <a:r>
-              <a:t>Blockchain y GDPR: la tension fundamental</a:t>
+              <a:t>Respuestas al repaso (1/2)</a:t>
             </a:r>
           </a:p>
         </p:txBody>
@@ -3423,6 +3437,7 @@
           <a:lstStyle/>
           <a:p>
             <a:pPr algn="ctr"/>
+            <a:endParaRPr/>
           </a:p>
         </p:txBody>
       </p:sp>
@@ -3434,8 +3449,8 @@
         </p:nvSpPr>
         <p:spPr>
           <a:xfrm>
-            <a:off x="640080" y="1280160"/>
-            <a:ext cx="10515600" cy="5029200"/>
+            <a:off x="560567" y="1051560"/>
+            <a:ext cx="10515600" cy="5734903"/>
           </a:xfrm>
           <a:prstGeom prst="rect">
             <a:avLst/>
@@ -3460,7 +3475,285 @@
               </a:defRPr>
             </a:pPr>
             <a:r>
-              <a:t>GDPR (Reglamento General de Proteccion de Datos) establece:</a:t>
+              <a:rPr dirty="0"/>
+              <a:t>1. GDPR vs </a:t>
+            </a:r>
+            <a:r>
+              <a:rPr dirty="0" err="1"/>
+              <a:t>inmutabilidad</a:t>
+            </a:r>
+            <a:r>
+              <a:rPr dirty="0"/>
+              <a:t> de blockchain:</a:t>
+            </a:r>
+          </a:p>
+          <a:p>
+            <a:pPr lvl="1">
+              <a:spcAft>
+                <a:spcPts val="400"/>
+              </a:spcAft>
+              <a:defRPr sz="1700">
+                <a:solidFill>
+                  <a:srgbClr val="666666"/>
+                </a:solidFill>
+                <a:latin typeface="Calibri"/>
+              </a:defRPr>
+            </a:pPr>
+            <a:r>
+              <a:rPr sz="1600" dirty="0"/>
+              <a:t>    No son incompatibles, </a:t>
+            </a:r>
+            <a:r>
+              <a:rPr sz="1600" dirty="0" err="1"/>
+              <a:t>pero</a:t>
+            </a:r>
+            <a:r>
+              <a:rPr sz="1600" dirty="0"/>
+              <a:t> </a:t>
+            </a:r>
+            <a:r>
+              <a:rPr sz="1600" dirty="0" err="1"/>
+              <a:t>requieren</a:t>
+            </a:r>
+            <a:r>
+              <a:rPr sz="1600" dirty="0"/>
+              <a:t> </a:t>
+            </a:r>
+            <a:r>
+              <a:rPr sz="1600" dirty="0" err="1"/>
+              <a:t>diseño</a:t>
+            </a:r>
+            <a:r>
+              <a:rPr sz="1600" dirty="0"/>
+              <a:t> </a:t>
+            </a:r>
+            <a:r>
+              <a:rPr sz="1600" dirty="0" err="1"/>
+              <a:t>cuidadoso</a:t>
+            </a:r>
+            <a:r>
+              <a:rPr sz="1600" dirty="0"/>
+              <a:t>.</a:t>
+            </a:r>
+          </a:p>
+          <a:p>
+            <a:pPr lvl="1">
+              <a:spcAft>
+                <a:spcPts val="400"/>
+              </a:spcAft>
+              <a:defRPr sz="1700">
+                <a:solidFill>
+                  <a:srgbClr val="666666"/>
+                </a:solidFill>
+                <a:latin typeface="Calibri"/>
+              </a:defRPr>
+            </a:pPr>
+            <a:r>
+              <a:rPr sz="1600" dirty="0"/>
+              <a:t>    NUNCA </a:t>
+            </a:r>
+            <a:r>
+              <a:rPr sz="1600" dirty="0" err="1"/>
+              <a:t>guardar</a:t>
+            </a:r>
+            <a:r>
+              <a:rPr sz="1600" dirty="0"/>
+              <a:t> </a:t>
+            </a:r>
+            <a:r>
+              <a:rPr sz="1600" dirty="0" err="1"/>
+              <a:t>datos</a:t>
+            </a:r>
+            <a:r>
+              <a:rPr sz="1600" dirty="0"/>
+              <a:t> </a:t>
+            </a:r>
+            <a:r>
+              <a:rPr sz="1600" dirty="0" err="1"/>
+              <a:t>personales</a:t>
+            </a:r>
+            <a:r>
+              <a:rPr sz="1600" dirty="0"/>
+              <a:t> on-chain — solo hash o </a:t>
+            </a:r>
+            <a:r>
+              <a:rPr sz="1600" dirty="0" err="1"/>
+              <a:t>referencia</a:t>
+            </a:r>
+            <a:r>
+              <a:rPr sz="1600" dirty="0"/>
+              <a:t>.</a:t>
+            </a:r>
+          </a:p>
+          <a:p>
+            <a:pPr lvl="1">
+              <a:spcAft>
+                <a:spcPts val="400"/>
+              </a:spcAft>
+              <a:defRPr sz="1700">
+                <a:solidFill>
+                  <a:srgbClr val="666666"/>
+                </a:solidFill>
+                <a:latin typeface="Calibri"/>
+              </a:defRPr>
+            </a:pPr>
+            <a:r>
+              <a:rPr sz="1600" dirty="0"/>
+              <a:t>    Datos reales off-chain (BD </a:t>
+            </a:r>
+            <a:r>
+              <a:rPr sz="1600" dirty="0" err="1"/>
+              <a:t>tradicional</a:t>
+            </a:r>
+            <a:r>
+              <a:rPr sz="1600" dirty="0"/>
+              <a:t>), </a:t>
+            </a:r>
+            <a:r>
+              <a:rPr sz="1600" dirty="0" err="1"/>
+              <a:t>borrables</a:t>
+            </a:r>
+            <a:r>
+              <a:rPr sz="1600" dirty="0"/>
+              <a:t> para </a:t>
+            </a:r>
+            <a:r>
+              <a:rPr sz="1600" dirty="0" err="1"/>
+              <a:t>cumplir</a:t>
+            </a:r>
+            <a:r>
+              <a:rPr sz="1600" dirty="0"/>
+              <a:t> derecho al </a:t>
+            </a:r>
+            <a:r>
+              <a:rPr sz="1600" dirty="0" err="1"/>
+              <a:t>olvido</a:t>
+            </a:r>
+            <a:r>
+              <a:rPr sz="1600" dirty="0"/>
+              <a:t>.</a:t>
+            </a:r>
+          </a:p>
+          <a:p>
+            <a:pPr lvl="1">
+              <a:spcAft>
+                <a:spcPts val="400"/>
+              </a:spcAft>
+              <a:defRPr sz="1700">
+                <a:solidFill>
+                  <a:srgbClr val="666666"/>
+                </a:solidFill>
+                <a:latin typeface="Calibri"/>
+              </a:defRPr>
+            </a:pPr>
+            <a:r>
+              <a:rPr sz="1600" dirty="0"/>
+              <a:t>    Private Data Collections con </a:t>
+            </a:r>
+            <a:r>
+              <a:rPr sz="1600" dirty="0" err="1"/>
+              <a:t>blockToLive</a:t>
+            </a:r>
+            <a:r>
+              <a:rPr sz="1600" dirty="0"/>
+              <a:t> </a:t>
+            </a:r>
+            <a:r>
+              <a:rPr sz="1600" dirty="0" err="1"/>
+              <a:t>permiten</a:t>
+            </a:r>
+            <a:r>
+              <a:rPr sz="1600" dirty="0"/>
+              <a:t> </a:t>
+            </a:r>
+            <a:r>
+              <a:rPr sz="1600" dirty="0" err="1"/>
+              <a:t>caducar</a:t>
+            </a:r>
+            <a:r>
+              <a:rPr sz="1600" dirty="0"/>
+              <a:t> </a:t>
+            </a:r>
+            <a:r>
+              <a:rPr sz="1600" dirty="0" err="1"/>
+              <a:t>datos</a:t>
+            </a:r>
+            <a:r>
+              <a:rPr sz="1600" dirty="0"/>
+              <a:t>.</a:t>
+            </a:r>
+          </a:p>
+          <a:p>
+            <a:pPr lvl="1">
+              <a:spcAft>
+                <a:spcPts val="400"/>
+              </a:spcAft>
+              <a:defRPr sz="1700">
+                <a:solidFill>
+                  <a:srgbClr val="666666"/>
+                </a:solidFill>
+                <a:latin typeface="Calibri"/>
+              </a:defRPr>
+            </a:pPr>
+            <a:r>
+              <a:rPr sz="1600" dirty="0"/>
+              <a:t>    </a:t>
+            </a:r>
+            <a:r>
+              <a:rPr sz="1400" dirty="0"/>
+              <a:t>Al</a:t>
+            </a:r>
+            <a:r>
+              <a:rPr sz="1600" dirty="0"/>
+              <a:t> </a:t>
+            </a:r>
+            <a:r>
+              <a:rPr sz="1600" dirty="0" err="1"/>
+              <a:t>borrar</a:t>
+            </a:r>
+            <a:r>
+              <a:rPr sz="1600" dirty="0"/>
+              <a:t> </a:t>
+            </a:r>
+            <a:r>
+              <a:rPr sz="1600" dirty="0" err="1"/>
+              <a:t>dato</a:t>
+            </a:r>
+            <a:r>
+              <a:rPr sz="1600" dirty="0"/>
+              <a:t> off-chain, </a:t>
+            </a:r>
+            <a:r>
+              <a:rPr sz="1600" dirty="0" err="1"/>
+              <a:t>el</a:t>
+            </a:r>
+            <a:r>
+              <a:rPr sz="1600" dirty="0"/>
+              <a:t> hash on-chain </a:t>
+            </a:r>
+            <a:r>
+              <a:rPr sz="1600" dirty="0" err="1"/>
+              <a:t>queda</a:t>
+            </a:r>
+            <a:r>
+              <a:rPr sz="1600" dirty="0"/>
+              <a:t> </a:t>
+            </a:r>
+            <a:r>
+              <a:rPr sz="1600" dirty="0" err="1"/>
+              <a:t>huerfano</a:t>
+            </a:r>
+            <a:r>
+              <a:rPr sz="1600" dirty="0"/>
+              <a:t> (</a:t>
+            </a:r>
+            <a:r>
+              <a:rPr sz="1600" dirty="0" err="1"/>
+              <a:t>pseudonimizacion</a:t>
+            </a:r>
+            <a:r>
+              <a:rPr sz="1600" dirty="0"/>
+              <a:t>).</a:t>
             </a:r>
           </a:p>
           <a:p>
@@ -3476,7 +3769,293 @@
               </a:defRPr>
             </a:pPr>
             <a:r>
-              <a:t>  Derecho al olvido: el ciudadano puede pedir que borren sus datos</a:t>
+              <a:rPr dirty="0"/>
+              <a:t>2. ¿Smart contract es un </a:t>
+            </a:r>
+            <a:r>
+              <a:rPr dirty="0" err="1"/>
+              <a:t>contrato</a:t>
+            </a:r>
+            <a:r>
+              <a:rPr dirty="0"/>
+              <a:t> legal? ¿</a:t>
+            </a:r>
+            <a:r>
+              <a:rPr dirty="0" err="1"/>
+              <a:t>Que</a:t>
+            </a:r>
+            <a:r>
+              <a:rPr dirty="0"/>
+              <a:t> </a:t>
+            </a:r>
+            <a:r>
+              <a:rPr dirty="0" err="1"/>
+              <a:t>falta</a:t>
+            </a:r>
+            <a:r>
+              <a:rPr dirty="0"/>
+              <a:t>?</a:t>
+            </a:r>
+          </a:p>
+          <a:p>
+            <a:pPr lvl="1">
+              <a:spcAft>
+                <a:spcPts val="400"/>
+              </a:spcAft>
+              <a:defRPr sz="1700">
+                <a:solidFill>
+                  <a:srgbClr val="666666"/>
+                </a:solidFill>
+                <a:latin typeface="Calibri"/>
+              </a:defRPr>
+            </a:pPr>
+            <a:r>
+              <a:rPr sz="1600" dirty="0"/>
+              <a:t>    NO, al </a:t>
+            </a:r>
+            <a:r>
+              <a:rPr sz="1600" dirty="0" err="1"/>
+              <a:t>menos</a:t>
+            </a:r>
+            <a:r>
+              <a:rPr sz="1600" dirty="0"/>
+              <a:t> no </a:t>
+            </a:r>
+            <a:r>
+              <a:rPr sz="1600" dirty="0" err="1"/>
+              <a:t>automaticamente</a:t>
+            </a:r>
+            <a:r>
+              <a:rPr sz="1600" dirty="0"/>
+              <a:t>. Un smart contract es </a:t>
+            </a:r>
+            <a:r>
+              <a:rPr sz="1600" dirty="0" err="1"/>
+              <a:t>codigo</a:t>
+            </a:r>
+            <a:r>
+              <a:rPr sz="1600" dirty="0"/>
+              <a:t>.</a:t>
+            </a:r>
+          </a:p>
+          <a:p>
+            <a:pPr lvl="1">
+              <a:spcAft>
+                <a:spcPts val="400"/>
+              </a:spcAft>
+              <a:defRPr sz="1700">
+                <a:solidFill>
+                  <a:srgbClr val="666666"/>
+                </a:solidFill>
+                <a:latin typeface="Calibri"/>
+              </a:defRPr>
+            </a:pPr>
+            <a:r>
+              <a:rPr sz="1600" dirty="0"/>
+              <a:t>    Para </a:t>
+            </a:r>
+            <a:r>
+              <a:rPr sz="1600" dirty="0" err="1"/>
+              <a:t>tener</a:t>
+            </a:r>
+            <a:r>
+              <a:rPr sz="1600" dirty="0"/>
+              <a:t> valor legal </a:t>
+            </a:r>
+            <a:r>
+              <a:rPr sz="1600" dirty="0" err="1"/>
+              <a:t>necesita</a:t>
+            </a:r>
+            <a:r>
+              <a:rPr sz="1600" dirty="0"/>
+              <a:t>: </a:t>
+            </a:r>
+            <a:r>
+              <a:rPr sz="1600" dirty="0" err="1"/>
+              <a:t>consentimiento</a:t>
+            </a:r>
+            <a:r>
+              <a:rPr sz="1600" dirty="0"/>
+              <a:t> </a:t>
+            </a:r>
+            <a:r>
+              <a:rPr sz="1600" dirty="0" err="1"/>
+              <a:t>explicito</a:t>
+            </a:r>
+            <a:r>
+              <a:rPr sz="1600" dirty="0"/>
+              <a:t> de las partes,</a:t>
+            </a:r>
+          </a:p>
+          <a:p>
+            <a:pPr lvl="1">
+              <a:spcAft>
+                <a:spcPts val="400"/>
+              </a:spcAft>
+              <a:defRPr sz="1700">
+                <a:solidFill>
+                  <a:srgbClr val="666666"/>
+                </a:solidFill>
+                <a:latin typeface="Calibri"/>
+              </a:defRPr>
+            </a:pPr>
+            <a:r>
+              <a:rPr sz="1600" dirty="0"/>
+              <a:t>    </a:t>
+            </a:r>
+            <a:r>
+              <a:rPr sz="1600" dirty="0" err="1"/>
+              <a:t>identificacion</a:t>
+            </a:r>
+            <a:r>
+              <a:rPr sz="1600" dirty="0"/>
+              <a:t> (no </a:t>
+            </a:r>
+            <a:r>
+              <a:rPr sz="1600" dirty="0" err="1"/>
+              <a:t>pseudonima</a:t>
+            </a:r>
+            <a:r>
+              <a:rPr sz="1600" dirty="0"/>
+              <a:t>), </a:t>
+            </a:r>
+            <a:r>
+              <a:rPr sz="1600" dirty="0" err="1"/>
+              <a:t>objeto</a:t>
+            </a:r>
+            <a:r>
+              <a:rPr sz="1600" dirty="0"/>
+              <a:t> </a:t>
+            </a:r>
+            <a:r>
+              <a:rPr sz="1600" dirty="0" err="1"/>
+              <a:t>licito</a:t>
+            </a:r>
+            <a:r>
+              <a:rPr sz="1600" dirty="0"/>
+              <a:t>, </a:t>
+            </a:r>
+            <a:r>
+              <a:rPr sz="1600" dirty="0" err="1"/>
+              <a:t>jurisdiccion</a:t>
+            </a:r>
+            <a:r>
+              <a:rPr sz="1600" dirty="0"/>
+              <a:t> </a:t>
+            </a:r>
+            <a:r>
+              <a:rPr sz="1600" dirty="0" err="1"/>
+              <a:t>clara</a:t>
+            </a:r>
+            <a:r>
+              <a:rPr sz="1600" dirty="0"/>
+              <a:t>,</a:t>
+            </a:r>
+          </a:p>
+          <a:p>
+            <a:pPr lvl="1">
+              <a:spcAft>
+                <a:spcPts val="400"/>
+              </a:spcAft>
+              <a:defRPr sz="1700">
+                <a:solidFill>
+                  <a:srgbClr val="666666"/>
+                </a:solidFill>
+                <a:latin typeface="Calibri"/>
+              </a:defRPr>
+            </a:pPr>
+            <a:r>
+              <a:rPr sz="1600" dirty="0"/>
+              <a:t>    </a:t>
+            </a:r>
+            <a:r>
+              <a:rPr sz="1600" dirty="0" err="1"/>
+              <a:t>mecanismo</a:t>
+            </a:r>
+            <a:r>
+              <a:rPr sz="1600" dirty="0"/>
+              <a:t> de </a:t>
+            </a:r>
+            <a:r>
+              <a:rPr sz="1600" dirty="0" err="1"/>
+              <a:t>resolucion</a:t>
+            </a:r>
+            <a:r>
+              <a:rPr sz="1600" dirty="0"/>
+              <a:t> de </a:t>
+            </a:r>
+            <a:r>
+              <a:rPr sz="1600" dirty="0" err="1"/>
+              <a:t>disputas</a:t>
+            </a:r>
+            <a:r>
+              <a:rPr sz="1600" dirty="0"/>
+              <a:t>.</a:t>
+            </a:r>
+          </a:p>
+          <a:p>
+            <a:pPr lvl="1">
+              <a:spcAft>
+                <a:spcPts val="400"/>
+              </a:spcAft>
+              <a:defRPr sz="1700">
+                <a:solidFill>
+                  <a:srgbClr val="666666"/>
+                </a:solidFill>
+                <a:latin typeface="Calibri"/>
+              </a:defRPr>
+            </a:pPr>
+            <a:r>
+              <a:rPr sz="1600" dirty="0"/>
+              <a:t>    </a:t>
+            </a:r>
+            <a:r>
+              <a:rPr sz="1600" dirty="0" err="1"/>
+              <a:t>Enfoque</a:t>
+            </a:r>
+            <a:r>
+              <a:rPr sz="1600" dirty="0"/>
+              <a:t> </a:t>
+            </a:r>
+            <a:r>
+              <a:rPr sz="1600" dirty="0" err="1"/>
+              <a:t>practico</a:t>
+            </a:r>
+            <a:r>
+              <a:rPr sz="1600" dirty="0"/>
+              <a:t>: </a:t>
+            </a:r>
+            <a:r>
+              <a:rPr sz="1600" dirty="0" err="1"/>
+              <a:t>contrato</a:t>
+            </a:r>
+            <a:r>
+              <a:rPr sz="1600" dirty="0"/>
+              <a:t> legal </a:t>
+            </a:r>
+            <a:r>
+              <a:rPr sz="1600" dirty="0" err="1"/>
+              <a:t>tradicional</a:t>
+            </a:r>
+            <a:r>
+              <a:rPr sz="1600" dirty="0"/>
+              <a:t> + smart contract </a:t>
+            </a:r>
+            <a:r>
+              <a:rPr sz="1600" dirty="0" err="1"/>
+              <a:t>que</a:t>
+            </a:r>
+            <a:r>
+              <a:rPr sz="1600" dirty="0"/>
+              <a:t> lo </a:t>
+            </a:r>
+            <a:r>
+              <a:rPr sz="1600" dirty="0" err="1"/>
+              <a:t>ejecuta</a:t>
+            </a:r>
+            <a:r>
+              <a:rPr sz="1600" dirty="0"/>
+              <a:t>.</a:t>
             </a:r>
           </a:p>
           <a:p>
@@ -3492,81 +4071,40 @@
               </a:defRPr>
             </a:pPr>
             <a:r>
-              <a:t>  Minimizacion: solo guardar los datos estrictamente necesarios</a:t>
-            </a:r>
-          </a:p>
-          <a:p>
-            <a:pPr>
-              <a:spcAft>
-                <a:spcPts val="800"/>
-              </a:spcAft>
-              <a:defRPr sz="2000">
-                <a:solidFill>
-                  <a:srgbClr val="333333"/>
-                </a:solidFill>
-                <a:latin typeface="Calibri"/>
-              </a:defRPr>
-            </a:pPr>
-            <a:r>
-              <a:t>  Limitacion de almacenamiento: no conservar datos mas de lo necesario</a:t>
-            </a:r>
-          </a:p>
-          <a:p>
-            <a:pPr>
-              <a:spcAft>
-                <a:spcPts val="800"/>
-              </a:spcAft>
-              <a:defRPr sz="2000">
-                <a:solidFill>
-                  <a:srgbClr val="333333"/>
-                </a:solidFill>
-                <a:latin typeface="Calibri"/>
-              </a:defRPr>
-            </a:pPr>
-          </a:p>
-          <a:p>
-            <a:pPr>
-              <a:spcAft>
-                <a:spcPts val="800"/>
-              </a:spcAft>
-              <a:defRPr sz="2000">
-                <a:solidFill>
-                  <a:srgbClr val="333333"/>
-                </a:solidFill>
-                <a:latin typeface="Calibri"/>
-              </a:defRPr>
-            </a:pPr>
-            <a:r>
-              <a:t>Blockchain establece: los datos son inmutables y permanentes</a:t>
-            </a:r>
-          </a:p>
-          <a:p>
-            <a:pPr>
-              <a:spcAft>
-                <a:spcPts val="800"/>
-              </a:spcAft>
-              <a:defRPr sz="2000">
-                <a:solidFill>
-                  <a:srgbClr val="333333"/>
-                </a:solidFill>
-                <a:latin typeface="Calibri"/>
-              </a:defRPr>
-            </a:pPr>
-          </a:p>
-          <a:p>
-            <a:pPr>
-              <a:spcAft>
-                <a:spcPts val="800"/>
-              </a:spcAft>
-              <a:defRPr sz="2000">
-                <a:solidFill>
-                  <a:srgbClr val="333333"/>
-                </a:solidFill>
-                <a:latin typeface="Calibri"/>
-              </a:defRPr>
-            </a:pPr>
-            <a:r>
-              <a:t>¿Es incompatible? No del todo, pero hay que disenar con cuidado:</a:t>
+              <a:rPr dirty="0"/>
+              <a:t>3. ¿</a:t>
+            </a:r>
+            <a:r>
+              <a:rPr dirty="0" err="1"/>
+              <a:t>Que</a:t>
+            </a:r>
+            <a:r>
+              <a:rPr dirty="0"/>
+              <a:t> es </a:t>
+            </a:r>
+            <a:r>
+              <a:rPr dirty="0" err="1"/>
+              <a:t>MiCA</a:t>
+            </a:r>
+            <a:r>
+              <a:rPr dirty="0"/>
+              <a:t> y a </a:t>
+            </a:r>
+            <a:r>
+              <a:rPr dirty="0" err="1"/>
+              <a:t>quien</a:t>
+            </a:r>
+            <a:r>
+              <a:rPr dirty="0"/>
+              <a:t> </a:t>
+            </a:r>
+            <a:r>
+              <a:rPr dirty="0" err="1"/>
+              <a:t>aplica</a:t>
+            </a:r>
+            <a:r>
+              <a:rPr dirty="0"/>
+              <a:t>?</a:t>
             </a:r>
           </a:p>
           <a:p>
@@ -3582,7 +4120,16 @@
               </a:defRPr>
             </a:pPr>
             <a:r>
-              <a:t>    NUNCA guardar datos personales directamente en el ledger</a:t>
+              <a:rPr sz="1600" dirty="0"/>
+              <a:t>    Markets in Crypto-Assets Regulation (</a:t>
+            </a:r>
+            <a:r>
+              <a:rPr sz="1600" dirty="0" err="1"/>
+              <a:t>diciembre</a:t>
+            </a:r>
+            <a:r>
+              <a:rPr sz="1600" dirty="0"/>
+              <a:t> 2024).</a:t>
             </a:r>
           </a:p>
           <a:p>
@@ -3598,7 +4145,40 @@
               </a:defRPr>
             </a:pPr>
             <a:r>
-              <a:t>    Guardar un hash o referencia: los datos reales off-chain (BD normal)</a:t>
+              <a:rPr sz="1600" dirty="0"/>
+              <a:t>    </a:t>
+            </a:r>
+            <a:r>
+              <a:rPr sz="1600" dirty="0" err="1"/>
+              <a:t>Aplica</a:t>
+            </a:r>
+            <a:r>
+              <a:rPr sz="1600" dirty="0"/>
+              <a:t> a: tokens de </a:t>
+            </a:r>
+            <a:r>
+              <a:rPr sz="1600" dirty="0" err="1"/>
+              <a:t>utilidad</a:t>
+            </a:r>
+            <a:r>
+              <a:rPr sz="1600" dirty="0"/>
+              <a:t>, stablecoins, </a:t>
+            </a:r>
+            <a:r>
+              <a:rPr sz="1600" dirty="0" err="1"/>
+              <a:t>criptoactivos</a:t>
+            </a:r>
+            <a:r>
+              <a:rPr sz="1600" dirty="0"/>
+              <a:t> </a:t>
+            </a:r>
+            <a:r>
+              <a:rPr sz="1600" dirty="0" err="1"/>
+              <a:t>publicos</a:t>
+            </a:r>
+            <a:r>
+              <a:rPr sz="1600" dirty="0"/>
+              <a:t>, exchanges.</a:t>
             </a:r>
           </a:p>
           <a:p>
@@ -3614,7 +4194,32 @@
               </a:defRPr>
             </a:pPr>
             <a:r>
-              <a:t>    Private Data Collections: los datos se pueden purgar (blockToLive)</a:t>
+              <a:rPr sz="1600" dirty="0"/>
+              <a:t>    NO </a:t>
+            </a:r>
+            <a:r>
+              <a:rPr sz="1600" dirty="0" err="1"/>
+              <a:t>aplica</a:t>
+            </a:r>
+            <a:r>
+              <a:rPr sz="1600" dirty="0"/>
+              <a:t> </a:t>
+            </a:r>
+            <a:r>
+              <a:rPr sz="1600" dirty="0" err="1"/>
+              <a:t>directamente</a:t>
+            </a:r>
+            <a:r>
+              <a:rPr sz="1600" dirty="0"/>
+              <a:t> a blockchain enterprise permissioned sin tokens </a:t>
+            </a:r>
+            <a:r>
+              <a:rPr sz="1600" dirty="0" err="1"/>
+              <a:t>publicos</a:t>
+            </a:r>
+            <a:r>
+              <a:rPr sz="1600" dirty="0"/>
+              <a:t>.</a:t>
             </a:r>
           </a:p>
           <a:p>
@@ -3630,7 +4235,113 @@
               </a:defRPr>
             </a:pPr>
             <a:r>
-              <a:t>    Si se borra el dato off-chain, el hash on-chain es inutil (pseudonimizacion)</a:t>
+              <a:rPr sz="1600" dirty="0"/>
+              <a:t>    </a:t>
+            </a:r>
+            <a:r>
+              <a:rPr sz="1600" dirty="0" err="1"/>
+              <a:t>Relevante</a:t>
+            </a:r>
+            <a:r>
+              <a:rPr sz="1600" dirty="0"/>
+              <a:t> </a:t>
+            </a:r>
+            <a:r>
+              <a:rPr sz="1600" dirty="0" err="1"/>
+              <a:t>si</a:t>
+            </a:r>
+            <a:r>
+              <a:rPr sz="1600" dirty="0"/>
+              <a:t> </a:t>
+            </a:r>
+            <a:r>
+              <a:rPr sz="1600" dirty="0" err="1"/>
+              <a:t>tu</a:t>
+            </a:r>
+            <a:r>
+              <a:rPr sz="1600" dirty="0"/>
+              <a:t> </a:t>
+            </a:r>
+            <a:r>
+              <a:rPr sz="1600" dirty="0" err="1"/>
+              <a:t>proyecto</a:t>
+            </a:r>
+            <a:r>
+              <a:rPr sz="1600" dirty="0"/>
+              <a:t> Fabric </a:t>
+            </a:r>
+            <a:r>
+              <a:rPr sz="1600" dirty="0" err="1"/>
+              <a:t>emite</a:t>
+            </a:r>
+            <a:r>
+              <a:rPr sz="1600" dirty="0"/>
+              <a:t> tokens </a:t>
+            </a:r>
+            <a:r>
+              <a:rPr sz="1600" dirty="0" err="1"/>
+              <a:t>que</a:t>
+            </a:r>
+            <a:r>
+              <a:rPr sz="1600" dirty="0"/>
+              <a:t> </a:t>
+            </a:r>
+            <a:r>
+              <a:rPr sz="1600" dirty="0" err="1"/>
+              <a:t>salen</a:t>
+            </a:r>
+            <a:r>
+              <a:rPr sz="1600" dirty="0"/>
+              <a:t> al mercado.</a:t>
+            </a:r>
+          </a:p>
+          <a:p>
+            <a:pPr lvl="1">
+              <a:spcAft>
+                <a:spcPts val="400"/>
+              </a:spcAft>
+              <a:defRPr sz="1700">
+                <a:solidFill>
+                  <a:srgbClr val="666666"/>
+                </a:solidFill>
+                <a:latin typeface="Calibri"/>
+              </a:defRPr>
+            </a:pPr>
+            <a:r>
+              <a:rPr sz="1600" dirty="0"/>
+              <a:t>    </a:t>
+            </a:r>
+            <a:r>
+              <a:rPr sz="1600" dirty="0" err="1"/>
+              <a:t>Requisitos</a:t>
+            </a:r>
+            <a:r>
+              <a:rPr sz="1600" dirty="0"/>
+              <a:t>: whitepaper, </a:t>
+            </a:r>
+            <a:r>
+              <a:rPr sz="1600" dirty="0" err="1"/>
+              <a:t>proteccion</a:t>
+            </a:r>
+            <a:r>
+              <a:rPr sz="1600" dirty="0"/>
+              <a:t> al </a:t>
+            </a:r>
+            <a:r>
+              <a:rPr sz="1600" dirty="0" err="1"/>
+              <a:t>inversor</a:t>
+            </a:r>
+            <a:r>
+              <a:rPr sz="1600" dirty="0"/>
+              <a:t>, </a:t>
+            </a:r>
+            <a:r>
+              <a:rPr sz="1600" dirty="0" err="1"/>
+              <a:t>autorizacion</a:t>
+            </a:r>
+            <a:r>
+              <a:rPr sz="1600" dirty="0"/>
+              <a:t> ESMA/CNMV.</a:t>
             </a:r>
           </a:p>
         </p:txBody>
@@ -3643,8 +4354,8 @@
 </p:sld>
 </file>
 
-<file path=ppt/slides/slide3.xml><?xml version="1.0" encoding="utf-8"?>
-<p:sld xmlns:a="http://schemas.openxmlformats.org/drawingml/2006/main" xmlns:p="http://schemas.openxmlformats.org/presentationml/2006/main" xmlns:r="http://schemas.openxmlformats.org/officeDocument/2006/relationships">
+<file path=ppt/slides/slide11.xml><?xml version="1.0" encoding="utf-8"?>
+<p:sld xmlns:a="http://schemas.openxmlformats.org/drawingml/2006/main" xmlns:r="http://schemas.openxmlformats.org/officeDocument/2006/relationships" xmlns:p="http://schemas.openxmlformats.org/presentationml/2006/main">
   <p:cSld>
     <p:spTree>
       <p:nvGrpSpPr>
@@ -3652,7 +4363,14 @@
         <p:cNvGrpSpPr/>
         <p:nvPr/>
       </p:nvGrpSpPr>
-      <p:grpSpPr/>
+      <p:grpSpPr>
+        <a:xfrm>
+          <a:off x="0" y="0"/>
+          <a:ext cx="0" cy="0"/>
+          <a:chOff x="0" y="0"/>
+          <a:chExt cx="0" cy="0"/>
+        </a:xfrm>
+      </p:grpSpPr>
       <p:sp>
         <p:nvSpPr>
           <p:cNvPr id="2" name="Rectangle 1"/>
@@ -3693,6 +4411,7 @@
           <a:lstStyle/>
           <a:p>
             <a:pPr algn="ctr"/>
+            <a:endParaRPr/>
           </a:p>
         </p:txBody>
       </p:sp>
@@ -3725,7 +4444,7 @@
               </a:defRPr>
             </a:pPr>
             <a:r>
-              <a:t>Smart contracts: ¿son contratos legales?</a:t>
+              <a:t>Respuestas al repaso (2/2)</a:t>
             </a:r>
           </a:p>
         </p:txBody>
@@ -3770,6 +4489,7 @@
           <a:lstStyle/>
           <a:p>
             <a:pPr algn="ctr"/>
+            <a:endParaRPr/>
           </a:p>
         </p:txBody>
       </p:sp>
@@ -3807,7 +4527,87 @@
               </a:defRPr>
             </a:pPr>
             <a:r>
-              <a:t>Respuesta corta: NO, al menos no automaticamente</a:t>
+              <a:t>4. Regulacion si tokenizas un bono en Fabric:</a:t>
+            </a:r>
+          </a:p>
+          <a:p>
+            <a:pPr lvl="1">
+              <a:spcAft>
+                <a:spcPts val="400"/>
+              </a:spcAft>
+              <a:defRPr sz="1700">
+                <a:solidFill>
+                  <a:srgbClr val="666666"/>
+                </a:solidFill>
+                <a:latin typeface="Calibri"/>
+              </a:defRPr>
+            </a:pPr>
+            <a:r>
+              <a:t>    Si el token representa un valor negociable -&gt; MiFID II aplica.</a:t>
+            </a:r>
+          </a:p>
+          <a:p>
+            <a:pPr lvl="1">
+              <a:spcAft>
+                <a:spcPts val="400"/>
+              </a:spcAft>
+              <a:defRPr sz="1700">
+                <a:solidFill>
+                  <a:srgbClr val="666666"/>
+                </a:solidFill>
+                <a:latin typeface="Calibri"/>
+              </a:defRPr>
+            </a:pPr>
+            <a:r>
+              <a:t>    Requiere autorizacion de la CNMV (Espana) o equivalente europeo.</a:t>
+            </a:r>
+          </a:p>
+          <a:p>
+            <a:pPr lvl="1">
+              <a:spcAft>
+                <a:spcPts val="400"/>
+              </a:spcAft>
+              <a:defRPr sz="1700">
+                <a:solidFill>
+                  <a:srgbClr val="666666"/>
+                </a:solidFill>
+                <a:latin typeface="Calibri"/>
+              </a:defRPr>
+            </a:pPr>
+            <a:r>
+              <a:t>    Aplican las mismas reglas que a valores tradicionales (folleto, KYC, etc).</a:t>
+            </a:r>
+          </a:p>
+          <a:p>
+            <a:pPr lvl="1">
+              <a:spcAft>
+                <a:spcPts val="400"/>
+              </a:spcAft>
+              <a:defRPr sz="1700">
+                <a:solidFill>
+                  <a:srgbClr val="666666"/>
+                </a:solidFill>
+                <a:latin typeface="Calibri"/>
+              </a:defRPr>
+            </a:pPr>
+            <a:r>
+              <a:t>    Si es una STO (Security Token Offering): mas regulado que ICO pero con marco.</a:t>
+            </a:r>
+          </a:p>
+          <a:p>
+            <a:pPr lvl="1">
+              <a:spcAft>
+                <a:spcPts val="400"/>
+              </a:spcAft>
+              <a:defRPr sz="1700">
+                <a:solidFill>
+                  <a:srgbClr val="666666"/>
+                </a:solidFill>
+                <a:latin typeface="Calibri"/>
+              </a:defRPr>
+            </a:pPr>
+            <a:r>
+              <a:t>    Tokenizacion interna entre orgs (no ventas publicas): menos regulacion directa.</a:t>
             </a:r>
           </a:p>
           <a:p>
@@ -3823,23 +4623,7 @@
               </a:defRPr>
             </a:pPr>
             <a:r>
-              <a:t>Un smart contract es codigo, no un contrato juridico</a:t>
-            </a:r>
-          </a:p>
-          <a:p>
-            <a:pPr>
-              <a:spcAft>
-                <a:spcPts val="800"/>
-              </a:spcAft>
-              <a:defRPr sz="2000">
-                <a:solidFill>
-                  <a:srgbClr val="333333"/>
-                </a:solidFill>
-                <a:latin typeface="Calibri"/>
-              </a:defRPr>
-            </a:pPr>
-            <a:r>
-              <a:t>Para que tenga valor legal necesita:</a:t>
+              <a:t>5. Si un chaincode tiene un bug, ¿quien responde?</a:t>
             </a:r>
           </a:p>
           <a:p>
@@ -3855,7 +4639,7 @@
               </a:defRPr>
             </a:pPr>
             <a:r>
-              <a:t>    Consentimiento de las partes (firma digital)</a:t>
+              <a:t>    Responsabilidad compartida: todas las orgs que aprobaron el lifecycle.</a:t>
             </a:r>
           </a:p>
           <a:p>
@@ -3871,7 +4655,7 @@
               </a:defRPr>
             </a:pPr>
             <a:r>
-              <a:t>    Objeto licito (lo que hace el contrato es legal)</a:t>
+              <a:t>    Preguntas clave a definir en el acuerdo del consorcio:</a:t>
             </a:r>
           </a:p>
           <a:p>
@@ -3887,7 +4671,7 @@
               </a:defRPr>
             </a:pPr>
             <a:r>
-              <a:t>    Identificacion de las partes (no anonimas)</a:t>
+              <a:t>      - ¿Quien audita los chaincodes antes de aprobarlos?</a:t>
             </a:r>
           </a:p>
           <a:p>
@@ -3903,7 +4687,7 @@
               </a:defRPr>
             </a:pPr>
             <a:r>
-              <a:t>    Jurisdiccion y ley aplicable definidas</a:t>
+              <a:t>      - ¿Hay seguro de responsabilidad civil?</a:t>
             </a:r>
           </a:p>
           <a:p>
@@ -3919,68 +4703,55 @@
               </a:defRPr>
             </a:pPr>
             <a:r>
-              <a:t>    Mecanismo de resolucion de disputas</a:t>
-            </a:r>
-          </a:p>
-          <a:p>
-            <a:pPr>
-              <a:spcAft>
-                <a:spcPts val="800"/>
-              </a:spcAft>
-              <a:defRPr sz="2000">
-                <a:solidFill>
-                  <a:srgbClr val="333333"/>
-                </a:solidFill>
-                <a:latin typeface="Calibri"/>
-              </a:defRPr>
-            </a:pPr>
-          </a:p>
-          <a:p>
-            <a:pPr>
-              <a:spcAft>
-                <a:spcPts val="800"/>
-              </a:spcAft>
-              <a:defRPr sz="2000">
-                <a:solidFill>
-                  <a:srgbClr val="333333"/>
-                </a:solidFill>
-                <a:latin typeface="Calibri"/>
-              </a:defRPr>
-            </a:pPr>
-            <a:r>
-              <a:t>Jurisprudencia actual: muy limitada, varia por pais</a:t>
-            </a:r>
-          </a:p>
-          <a:p>
-            <a:pPr>
-              <a:spcAft>
-                <a:spcPts val="800"/>
-              </a:spcAft>
-              <a:defRPr sz="2000">
-                <a:solidFill>
-                  <a:srgbClr val="333333"/>
-                </a:solidFill>
-                <a:latin typeface="Calibri"/>
-              </a:defRPr>
-            </a:pPr>
-            <a:r>
-              <a:t>Enfoque practico: el smart contract EJECUTA las clausulas de un contrato legal separado</a:t>
-            </a:r>
-          </a:p>
-          <a:p>
-            <a:pPr>
-              <a:spcAft>
-                <a:spcPts val="800"/>
-              </a:spcAft>
-              <a:defRPr sz="2000">
-                <a:solidFill>
-                  <a:srgbClr val="333333"/>
-                </a:solidFill>
-                <a:latin typeface="Calibri"/>
-              </a:defRPr>
-            </a:pPr>
-            <a:r>
-              <a:t>El contrato legal dice QUE se hace. El smart contract COMO se ejecuta.</a:t>
+              <a:t>      - ¿Mecanismo de compensacion?</a:t>
+            </a:r>
+          </a:p>
+          <a:p>
+            <a:pPr lvl="1">
+              <a:spcAft>
+                <a:spcPts val="400"/>
+              </a:spcAft>
+              <a:defRPr sz="1700">
+                <a:solidFill>
+                  <a:srgbClr val="666666"/>
+                </a:solidFill>
+                <a:latin typeface="Calibri"/>
+              </a:defRPr>
+            </a:pPr>
+            <a:r>
+              <a:t>      - ¿Jurisdiccion y ley aplicables?</a:t>
+            </a:r>
+          </a:p>
+          <a:p>
+            <a:pPr lvl="1">
+              <a:spcAft>
+                <a:spcPts val="400"/>
+              </a:spcAft>
+              <a:defRPr sz="1700">
+                <a:solidFill>
+                  <a:srgbClr val="666666"/>
+                </a:solidFill>
+                <a:latin typeface="Calibri"/>
+              </a:defRPr>
+            </a:pPr>
+            <a:r>
+              <a:t>    En la practica: el desarrollador/proveedor responde contractualmente.</a:t>
+            </a:r>
+          </a:p>
+          <a:p>
+            <a:pPr lvl="1">
+              <a:spcAft>
+                <a:spcPts val="400"/>
+              </a:spcAft>
+              <a:defRPr sz="1700">
+                <a:solidFill>
+                  <a:srgbClr val="666666"/>
+                </a:solidFill>
+                <a:latin typeface="Calibri"/>
+              </a:defRPr>
+            </a:pPr>
+            <a:r>
+              <a:t>    El consorcio establece limites via SLA y clausulas de indemnizacion.</a:t>
             </a:r>
           </a:p>
         </p:txBody>
@@ -3993,8 +4764,8 @@
 </p:sld>
 </file>
 
-<file path=ppt/slides/slide4.xml><?xml version="1.0" encoding="utf-8"?>
-<p:sld xmlns:a="http://schemas.openxmlformats.org/drawingml/2006/main" xmlns:p="http://schemas.openxmlformats.org/presentationml/2006/main" xmlns:r="http://schemas.openxmlformats.org/officeDocument/2006/relationships">
+<file path=ppt/slides/slide2.xml><?xml version="1.0" encoding="utf-8"?>
+<p:sld xmlns:a="http://schemas.openxmlformats.org/drawingml/2006/main" xmlns:r="http://schemas.openxmlformats.org/officeDocument/2006/relationships" xmlns:p="http://schemas.openxmlformats.org/presentationml/2006/main">
   <p:cSld>
     <p:spTree>
       <p:nvGrpSpPr>
@@ -4002,7 +4773,14 @@
         <p:cNvGrpSpPr/>
         <p:nvPr/>
       </p:nvGrpSpPr>
-      <p:grpSpPr/>
+      <p:grpSpPr>
+        <a:xfrm>
+          <a:off x="0" y="0"/>
+          <a:ext cx="0" cy="0"/>
+          <a:chOff x="0" y="0"/>
+          <a:chExt cx="0" cy="0"/>
+        </a:xfrm>
+      </p:grpSpPr>
       <p:sp>
         <p:nvSpPr>
           <p:cNvPr id="2" name="Rectangle 1"/>
@@ -4043,6 +4821,7 @@
           <a:lstStyle/>
           <a:p>
             <a:pPr algn="ctr"/>
+            <a:endParaRPr/>
           </a:p>
         </p:txBody>
       </p:sp>
@@ -4075,7 +4854,7 @@
               </a:defRPr>
             </a:pPr>
             <a:r>
-              <a:t>MiCA: regulacion europea de criptoactivos</a:t>
+              <a:t>Blockchain y GDPR: la tension fundamental</a:t>
             </a:r>
           </a:p>
         </p:txBody>
@@ -4120,6 +4899,7 @@
           <a:lstStyle/>
           <a:p>
             <a:pPr algn="ctr"/>
+            <a:endParaRPr/>
           </a:p>
         </p:txBody>
       </p:sp>
@@ -4157,7 +4937,7 @@
               </a:defRPr>
             </a:pPr>
             <a:r>
-              <a:t>Markets in Crypto-Assets Regulation (MiCA) — en vigor desde diciembre 2024</a:t>
+              <a:t>GDPR (Reglamento General de Proteccion de Datos) establece:</a:t>
             </a:r>
           </a:p>
           <a:p>
@@ -4173,7 +4953,7 @@
               </a:defRPr>
             </a:pPr>
             <a:r>
-              <a:t>Aplica a: tokens de utilidad, stablecoins, criptoactivos en general</a:t>
+              <a:t>  Derecho al olvido: el ciudadano puede pedir que borren sus datos</a:t>
             </a:r>
           </a:p>
           <a:p>
@@ -4189,7 +4969,7 @@
               </a:defRPr>
             </a:pPr>
             <a:r>
-              <a:t>NO aplica directamente a: blockchain enterprise/permissioned sin tokens publicos</a:t>
+              <a:t>  Minimizacion: solo guardar los datos estrictamente necesarios</a:t>
             </a:r>
           </a:p>
           <a:p>
@@ -4205,7 +4985,7 @@
               </a:defRPr>
             </a:pPr>
             <a:r>
-              <a:t>Pero es relevante si tu proyecto Fabric incluye tokens que salen al mercado</a:t>
+              <a:t>  Limitacion de almacenamiento: no conservar datos mas de lo necesario</a:t>
             </a:r>
           </a:p>
           <a:p>
@@ -4220,6 +5000,7 @@
                 <a:latin typeface="Calibri"/>
               </a:defRPr>
             </a:pPr>
+            <a:endParaRPr/>
           </a:p>
           <a:p>
             <a:pPr>
@@ -4234,7 +5015,37 @@
               </a:defRPr>
             </a:pPr>
             <a:r>
-              <a:t>Puntos clave de MiCA:</a:t>
+              <a:t>Blockchain establece: los datos son inmutables y permanentes</a:t>
+            </a:r>
+          </a:p>
+          <a:p>
+            <a:pPr>
+              <a:spcAft>
+                <a:spcPts val="800"/>
+              </a:spcAft>
+              <a:defRPr sz="2000">
+                <a:solidFill>
+                  <a:srgbClr val="333333"/>
+                </a:solidFill>
+                <a:latin typeface="Calibri"/>
+              </a:defRPr>
+            </a:pPr>
+            <a:endParaRPr/>
+          </a:p>
+          <a:p>
+            <a:pPr>
+              <a:spcAft>
+                <a:spcPts val="800"/>
+              </a:spcAft>
+              <a:defRPr sz="2000">
+                <a:solidFill>
+                  <a:srgbClr val="333333"/>
+                </a:solidFill>
+                <a:latin typeface="Calibri"/>
+              </a:defRPr>
+            </a:pPr>
+            <a:r>
+              <a:t>¿Es incompatible? No del todo, pero hay que disenar con cuidado:</a:t>
             </a:r>
           </a:p>
           <a:p>
@@ -4250,7 +5061,7 @@
               </a:defRPr>
             </a:pPr>
             <a:r>
-              <a:t>    Emisores de stablecoins: necesitan autorizacion y reservas auditadas</a:t>
+              <a:t>    NUNCA guardar datos personales directamente en el ledger</a:t>
             </a:r>
           </a:p>
           <a:p>
@@ -4266,7 +5077,7 @@
               </a:defRPr>
             </a:pPr>
             <a:r>
-              <a:t>    Exchanges y custodios: necesitan licencia</a:t>
+              <a:t>    Guardar un hash o referencia: los datos reales off-chain (BD normal)</a:t>
             </a:r>
           </a:p>
           <a:p>
@@ -4282,7 +5093,7 @@
               </a:defRPr>
             </a:pPr>
             <a:r>
-              <a:t>    Whitepaper obligatorio: describir el token, riesgos, derechos</a:t>
+              <a:t>    Private Data Collections: los datos se pueden purgar (blockToLive)</a:t>
             </a:r>
           </a:p>
           <a:p>
@@ -4298,23 +5109,7 @@
               </a:defRPr>
             </a:pPr>
             <a:r>
-              <a:t>    Proteccion al inversor: informacion clara, derecho de retirada</a:t>
-            </a:r>
-          </a:p>
-          <a:p>
-            <a:pPr lvl="1">
-              <a:spcAft>
-                <a:spcPts val="400"/>
-              </a:spcAft>
-              <a:defRPr sz="1700">
-                <a:solidFill>
-                  <a:srgbClr val="666666"/>
-                </a:solidFill>
-                <a:latin typeface="Calibri"/>
-              </a:defRPr>
-            </a:pPr>
-            <a:r>
-              <a:t>    Supervisores: ESMA y autoridades nacionales (CNMV en Espana)</a:t>
+              <a:t>    Si se borra el dato off-chain, el hash on-chain es inutil (pseudonimizacion)</a:t>
             </a:r>
           </a:p>
         </p:txBody>
@@ -4327,8 +5122,8 @@
 </p:sld>
 </file>
 
-<file path=ppt/slides/slide5.xml><?xml version="1.0" encoding="utf-8"?>
-<p:sld xmlns:a="http://schemas.openxmlformats.org/drawingml/2006/main" xmlns:p="http://schemas.openxmlformats.org/presentationml/2006/main" xmlns:r="http://schemas.openxmlformats.org/officeDocument/2006/relationships">
+<file path=ppt/slides/slide3.xml><?xml version="1.0" encoding="utf-8"?>
+<p:sld xmlns:a="http://schemas.openxmlformats.org/drawingml/2006/main" xmlns:r="http://schemas.openxmlformats.org/officeDocument/2006/relationships" xmlns:p="http://schemas.openxmlformats.org/presentationml/2006/main">
   <p:cSld>
     <p:spTree>
       <p:nvGrpSpPr>
@@ -4336,7 +5131,14 @@
         <p:cNvGrpSpPr/>
         <p:nvPr/>
       </p:nvGrpSpPr>
-      <p:grpSpPr/>
+      <p:grpSpPr>
+        <a:xfrm>
+          <a:off x="0" y="0"/>
+          <a:ext cx="0" cy="0"/>
+          <a:chOff x="0" y="0"/>
+          <a:chExt cx="0" cy="0"/>
+        </a:xfrm>
+      </p:grpSpPr>
       <p:sp>
         <p:nvSpPr>
           <p:cNvPr id="2" name="Rectangle 1"/>
@@ -4377,6 +5179,7 @@
           <a:lstStyle/>
           <a:p>
             <a:pPr algn="ctr"/>
+            <a:endParaRPr/>
           </a:p>
         </p:txBody>
       </p:sp>
@@ -4409,7 +5212,7 @@
               </a:defRPr>
             </a:pPr>
             <a:r>
-              <a:t>Tokenizacion de activos: regulacion actual</a:t>
+              <a:t>Smart contracts: ¿son contratos legales?</a:t>
             </a:r>
           </a:p>
         </p:txBody>
@@ -4454,6 +5257,7 @@
           <a:lstStyle/>
           <a:p>
             <a:pPr algn="ctr"/>
+            <a:endParaRPr/>
           </a:p>
         </p:txBody>
       </p:sp>
@@ -4491,7 +5295,7 @@
               </a:defRPr>
             </a:pPr>
             <a:r>
-              <a:t>Si tokenizas un activo real (bono, accion, inmueble) en Fabric:</a:t>
+              <a:t>Respuesta corta: NO, al menos no automaticamente</a:t>
             </a:r>
           </a:p>
           <a:p>
@@ -4507,7 +5311,7 @@
               </a:defRPr>
             </a:pPr>
             <a:r>
-              <a:t>  El token puede ser un 'valor negociable' segun MiFID II</a:t>
+              <a:t>Un smart contract es codigo, no un contrato juridico</a:t>
             </a:r>
           </a:p>
           <a:p>
@@ -4523,7 +5327,87 @@
               </a:defRPr>
             </a:pPr>
             <a:r>
-              <a:t>  Necesitas autorizacion de la CNMV (Espana) o equivalente europeo</a:t>
+              <a:t>Para que tenga valor legal necesita:</a:t>
+            </a:r>
+          </a:p>
+          <a:p>
+            <a:pPr lvl="1">
+              <a:spcAft>
+                <a:spcPts val="400"/>
+              </a:spcAft>
+              <a:defRPr sz="1700">
+                <a:solidFill>
+                  <a:srgbClr val="666666"/>
+                </a:solidFill>
+                <a:latin typeface="Calibri"/>
+              </a:defRPr>
+            </a:pPr>
+            <a:r>
+              <a:t>    Consentimiento de las partes (firma digital)</a:t>
+            </a:r>
+          </a:p>
+          <a:p>
+            <a:pPr lvl="1">
+              <a:spcAft>
+                <a:spcPts val="400"/>
+              </a:spcAft>
+              <a:defRPr sz="1700">
+                <a:solidFill>
+                  <a:srgbClr val="666666"/>
+                </a:solidFill>
+                <a:latin typeface="Calibri"/>
+              </a:defRPr>
+            </a:pPr>
+            <a:r>
+              <a:t>    Objeto licito (lo que hace el contrato es legal)</a:t>
+            </a:r>
+          </a:p>
+          <a:p>
+            <a:pPr lvl="1">
+              <a:spcAft>
+                <a:spcPts val="400"/>
+              </a:spcAft>
+              <a:defRPr sz="1700">
+                <a:solidFill>
+                  <a:srgbClr val="666666"/>
+                </a:solidFill>
+                <a:latin typeface="Calibri"/>
+              </a:defRPr>
+            </a:pPr>
+            <a:r>
+              <a:t>    Identificacion de las partes (no anonimas)</a:t>
+            </a:r>
+          </a:p>
+          <a:p>
+            <a:pPr lvl="1">
+              <a:spcAft>
+                <a:spcPts val="400"/>
+              </a:spcAft>
+              <a:defRPr sz="1700">
+                <a:solidFill>
+                  <a:srgbClr val="666666"/>
+                </a:solidFill>
+                <a:latin typeface="Calibri"/>
+              </a:defRPr>
+            </a:pPr>
+            <a:r>
+              <a:t>    Jurisdiccion y ley aplicable definidas</a:t>
+            </a:r>
+          </a:p>
+          <a:p>
+            <a:pPr lvl="1">
+              <a:spcAft>
+                <a:spcPts val="400"/>
+              </a:spcAft>
+              <a:defRPr sz="1700">
+                <a:solidFill>
+                  <a:srgbClr val="666666"/>
+                </a:solidFill>
+                <a:latin typeface="Calibri"/>
+              </a:defRPr>
+            </a:pPr>
+            <a:r>
+              <a:t>    Mecanismo de resolucion de disputas</a:t>
             </a:r>
           </a:p>
           <a:p>
@@ -4538,9 +5422,7 @@
                 <a:latin typeface="Calibri"/>
               </a:defRPr>
             </a:pPr>
-            <a:r>
-              <a:t>  Aplican las mismas reglas que a los valores tradicionales</a:t>
-            </a:r>
+            <a:endParaRPr/>
           </a:p>
           <a:p>
             <a:pPr>
@@ -4554,6 +5436,9 @@
                 <a:latin typeface="Calibri"/>
               </a:defRPr>
             </a:pPr>
+            <a:r>
+              <a:t>Jurisprudencia actual: muy limitada, varia por pais</a:t>
+            </a:r>
           </a:p>
           <a:p>
             <a:pPr>
@@ -4568,7 +5453,7 @@
               </a:defRPr>
             </a:pPr>
             <a:r>
-              <a:t>Security Token Offerings (STOs): tokenizar + vender al publico</a:t>
+              <a:t>Enfoque practico: el smart contract EJECUTA las clausulas de un contrato legal separado</a:t>
             </a:r>
           </a:p>
           <a:p>
@@ -4584,68 +5469,7 @@
               </a:defRPr>
             </a:pPr>
             <a:r>
-              <a:t>  Mas regulado que una ICO, pero legal y con marco claro</a:t>
-            </a:r>
-          </a:p>
-          <a:p>
-            <a:pPr>
-              <a:spcAft>
-                <a:spcPts val="800"/>
-              </a:spcAft>
-              <a:defRPr sz="2000">
-                <a:solidFill>
-                  <a:srgbClr val="333333"/>
-                </a:solidFill>
-                <a:latin typeface="Calibri"/>
-              </a:defRPr>
-            </a:pPr>
-            <a:r>
-              <a:t>  Ejemplo: Bit2Me STX (autorizado por CNMV bajo regimen sandbox)</a:t>
-            </a:r>
-          </a:p>
-          <a:p>
-            <a:pPr>
-              <a:spcAft>
-                <a:spcPts val="800"/>
-              </a:spcAft>
-              <a:defRPr sz="2000">
-                <a:solidFill>
-                  <a:srgbClr val="333333"/>
-                </a:solidFill>
-                <a:latin typeface="Calibri"/>
-              </a:defRPr>
-            </a:pPr>
-          </a:p>
-          <a:p>
-            <a:pPr>
-              <a:spcAft>
-                <a:spcPts val="800"/>
-              </a:spcAft>
-              <a:defRPr sz="2000">
-                <a:solidFill>
-                  <a:srgbClr val="333333"/>
-                </a:solidFill>
-                <a:latin typeface="Calibri"/>
-              </a:defRPr>
-            </a:pPr>
-            <a:r>
-              <a:t>Tokenizacion interna (entre orgs de un consorcio): menos regulacion</a:t>
-            </a:r>
-          </a:p>
-          <a:p>
-            <a:pPr>
-              <a:spcAft>
-                <a:spcPts val="800"/>
-              </a:spcAft>
-              <a:defRPr sz="2000">
-                <a:solidFill>
-                  <a:srgbClr val="333333"/>
-                </a:solidFill>
-                <a:latin typeface="Calibri"/>
-              </a:defRPr>
-            </a:pPr>
-            <a:r>
-              <a:t>  Si los tokens no salen de la red permissioned, MiCA no aplica directamente</a:t>
+              <a:t>El contrato legal dice QUE se hace. El smart contract COMO se ejecuta.</a:t>
             </a:r>
           </a:p>
         </p:txBody>
@@ -4658,8 +5482,8 @@
 </p:sld>
 </file>
 
-<file path=ppt/slides/slide6.xml><?xml version="1.0" encoding="utf-8"?>
-<p:sld xmlns:a="http://schemas.openxmlformats.org/drawingml/2006/main" xmlns:p="http://schemas.openxmlformats.org/presentationml/2006/main" xmlns:r="http://schemas.openxmlformats.org/officeDocument/2006/relationships">
+<file path=ppt/slides/slide4.xml><?xml version="1.0" encoding="utf-8"?>
+<p:sld xmlns:a="http://schemas.openxmlformats.org/drawingml/2006/main" xmlns:r="http://schemas.openxmlformats.org/officeDocument/2006/relationships" xmlns:p="http://schemas.openxmlformats.org/presentationml/2006/main">
   <p:cSld>
     <p:spTree>
       <p:nvGrpSpPr>
@@ -4667,7 +5491,14 @@
         <p:cNvGrpSpPr/>
         <p:nvPr/>
       </p:nvGrpSpPr>
-      <p:grpSpPr/>
+      <p:grpSpPr>
+        <a:xfrm>
+          <a:off x="0" y="0"/>
+          <a:ext cx="0" cy="0"/>
+          <a:chOff x="0" y="0"/>
+          <a:chExt cx="0" cy="0"/>
+        </a:xfrm>
+      </p:grpSpPr>
       <p:sp>
         <p:nvSpPr>
           <p:cNvPr id="2" name="Rectangle 1"/>
@@ -4708,6 +5539,7 @@
           <a:lstStyle/>
           <a:p>
             <a:pPr algn="ctr"/>
+            <a:endParaRPr/>
           </a:p>
         </p:txBody>
       </p:sp>
@@ -4740,7 +5572,7 @@
               </a:defRPr>
             </a:pPr>
             <a:r>
-              <a:t>Responsabilidad legal: si el chaincode tiene un bug</a:t>
+              <a:t>MiCA: regulacion europea de criptoactivos</a:t>
             </a:r>
           </a:p>
         </p:txBody>
@@ -4785,6 +5617,7 @@
           <a:lstStyle/>
           <a:p>
             <a:pPr algn="ctr"/>
+            <a:endParaRPr/>
           </a:p>
         </p:txBody>
       </p:sp>
@@ -4822,6 +5655,692 @@
               </a:defRPr>
             </a:pPr>
             <a:r>
+              <a:t>Markets in Crypto-Assets Regulation (MiCA) — en vigor desde diciembre 2024</a:t>
+            </a:r>
+          </a:p>
+          <a:p>
+            <a:pPr>
+              <a:spcAft>
+                <a:spcPts val="800"/>
+              </a:spcAft>
+              <a:defRPr sz="2000">
+                <a:solidFill>
+                  <a:srgbClr val="333333"/>
+                </a:solidFill>
+                <a:latin typeface="Calibri"/>
+              </a:defRPr>
+            </a:pPr>
+            <a:r>
+              <a:t>Aplica a: tokens de utilidad, stablecoins, criptoactivos en general</a:t>
+            </a:r>
+          </a:p>
+          <a:p>
+            <a:pPr>
+              <a:spcAft>
+                <a:spcPts val="800"/>
+              </a:spcAft>
+              <a:defRPr sz="2000">
+                <a:solidFill>
+                  <a:srgbClr val="333333"/>
+                </a:solidFill>
+                <a:latin typeface="Calibri"/>
+              </a:defRPr>
+            </a:pPr>
+            <a:r>
+              <a:t>NO aplica directamente a: blockchain enterprise/permissioned sin tokens publicos</a:t>
+            </a:r>
+          </a:p>
+          <a:p>
+            <a:pPr>
+              <a:spcAft>
+                <a:spcPts val="800"/>
+              </a:spcAft>
+              <a:defRPr sz="2000">
+                <a:solidFill>
+                  <a:srgbClr val="333333"/>
+                </a:solidFill>
+                <a:latin typeface="Calibri"/>
+              </a:defRPr>
+            </a:pPr>
+            <a:r>
+              <a:t>Pero es relevante si tu proyecto Fabric incluye tokens que salen al mercado</a:t>
+            </a:r>
+          </a:p>
+          <a:p>
+            <a:pPr>
+              <a:spcAft>
+                <a:spcPts val="800"/>
+              </a:spcAft>
+              <a:defRPr sz="2000">
+                <a:solidFill>
+                  <a:srgbClr val="333333"/>
+                </a:solidFill>
+                <a:latin typeface="Calibri"/>
+              </a:defRPr>
+            </a:pPr>
+            <a:endParaRPr/>
+          </a:p>
+          <a:p>
+            <a:pPr>
+              <a:spcAft>
+                <a:spcPts val="800"/>
+              </a:spcAft>
+              <a:defRPr sz="2000">
+                <a:solidFill>
+                  <a:srgbClr val="333333"/>
+                </a:solidFill>
+                <a:latin typeface="Calibri"/>
+              </a:defRPr>
+            </a:pPr>
+            <a:r>
+              <a:t>Puntos clave de MiCA:</a:t>
+            </a:r>
+          </a:p>
+          <a:p>
+            <a:pPr lvl="1">
+              <a:spcAft>
+                <a:spcPts val="400"/>
+              </a:spcAft>
+              <a:defRPr sz="1700">
+                <a:solidFill>
+                  <a:srgbClr val="666666"/>
+                </a:solidFill>
+                <a:latin typeface="Calibri"/>
+              </a:defRPr>
+            </a:pPr>
+            <a:r>
+              <a:t>    Emisores de stablecoins: necesitan autorizacion y reservas auditadas</a:t>
+            </a:r>
+          </a:p>
+          <a:p>
+            <a:pPr lvl="1">
+              <a:spcAft>
+                <a:spcPts val="400"/>
+              </a:spcAft>
+              <a:defRPr sz="1700">
+                <a:solidFill>
+                  <a:srgbClr val="666666"/>
+                </a:solidFill>
+                <a:latin typeface="Calibri"/>
+              </a:defRPr>
+            </a:pPr>
+            <a:r>
+              <a:t>    Exchanges y custodios: necesitan licencia</a:t>
+            </a:r>
+          </a:p>
+          <a:p>
+            <a:pPr lvl="1">
+              <a:spcAft>
+                <a:spcPts val="400"/>
+              </a:spcAft>
+              <a:defRPr sz="1700">
+                <a:solidFill>
+                  <a:srgbClr val="666666"/>
+                </a:solidFill>
+                <a:latin typeface="Calibri"/>
+              </a:defRPr>
+            </a:pPr>
+            <a:r>
+              <a:t>    Whitepaper obligatorio: describir el token, riesgos, derechos</a:t>
+            </a:r>
+          </a:p>
+          <a:p>
+            <a:pPr lvl="1">
+              <a:spcAft>
+                <a:spcPts val="400"/>
+              </a:spcAft>
+              <a:defRPr sz="1700">
+                <a:solidFill>
+                  <a:srgbClr val="666666"/>
+                </a:solidFill>
+                <a:latin typeface="Calibri"/>
+              </a:defRPr>
+            </a:pPr>
+            <a:r>
+              <a:t>    Proteccion al inversor: informacion clara, derecho de retirada</a:t>
+            </a:r>
+          </a:p>
+          <a:p>
+            <a:pPr lvl="1">
+              <a:spcAft>
+                <a:spcPts val="400"/>
+              </a:spcAft>
+              <a:defRPr sz="1700">
+                <a:solidFill>
+                  <a:srgbClr val="666666"/>
+                </a:solidFill>
+                <a:latin typeface="Calibri"/>
+              </a:defRPr>
+            </a:pPr>
+            <a:r>
+              <a:t>    Supervisores: ESMA y autoridades nacionales (CNMV en Espana)</a:t>
+            </a:r>
+          </a:p>
+        </p:txBody>
+      </p:sp>
+    </p:spTree>
+  </p:cSld>
+  <p:clrMapOvr>
+    <a:masterClrMapping/>
+  </p:clrMapOvr>
+</p:sld>
+</file>
+
+<file path=ppt/slides/slide5.xml><?xml version="1.0" encoding="utf-8"?>
+<p:sld xmlns:a="http://schemas.openxmlformats.org/drawingml/2006/main" xmlns:r="http://schemas.openxmlformats.org/officeDocument/2006/relationships" xmlns:p="http://schemas.openxmlformats.org/presentationml/2006/main">
+  <p:cSld>
+    <p:spTree>
+      <p:nvGrpSpPr>
+        <p:cNvPr id="1" name=""/>
+        <p:cNvGrpSpPr/>
+        <p:nvPr/>
+      </p:nvGrpSpPr>
+      <p:grpSpPr>
+        <a:xfrm>
+          <a:off x="0" y="0"/>
+          <a:ext cx="0" cy="0"/>
+          <a:chOff x="0" y="0"/>
+          <a:chExt cx="0" cy="0"/>
+        </a:xfrm>
+      </p:grpSpPr>
+      <p:sp>
+        <p:nvSpPr>
+          <p:cNvPr id="2" name="Rectangle 1"/>
+          <p:cNvSpPr/>
+          <p:nvPr/>
+        </p:nvSpPr>
+        <p:spPr>
+          <a:xfrm>
+            <a:off x="0" y="0"/>
+            <a:ext cx="12188952" cy="73152"/>
+          </a:xfrm>
+          <a:prstGeom prst="rect">
+            <a:avLst/>
+          </a:prstGeom>
+          <a:solidFill>
+            <a:srgbClr val="22627E"/>
+          </a:solidFill>
+          <a:ln>
+            <a:noFill/>
+          </a:ln>
+        </p:spPr>
+        <p:style>
+          <a:lnRef idx="1">
+            <a:schemeClr val="accent1"/>
+          </a:lnRef>
+          <a:fillRef idx="3">
+            <a:schemeClr val="accent1"/>
+          </a:fillRef>
+          <a:effectRef idx="2">
+            <a:schemeClr val="accent1"/>
+          </a:effectRef>
+          <a:fontRef idx="minor">
+            <a:schemeClr val="lt1"/>
+          </a:fontRef>
+        </p:style>
+        <p:txBody>
+          <a:bodyPr rtlCol="0" anchor="ctr"/>
+          <a:lstStyle/>
+          <a:p>
+            <a:pPr algn="ctr"/>
+            <a:endParaRPr/>
+          </a:p>
+        </p:txBody>
+      </p:sp>
+      <p:sp>
+        <p:nvSpPr>
+          <p:cNvPr id="3" name="TextBox 2"/>
+          <p:cNvSpPr txBox="1"/>
+          <p:nvPr/>
+        </p:nvSpPr>
+        <p:spPr>
+          <a:xfrm>
+            <a:off x="457200" y="274320"/>
+            <a:ext cx="10972800" cy="731520"/>
+          </a:xfrm>
+          <a:prstGeom prst="rect">
+            <a:avLst/>
+          </a:prstGeom>
+          <a:noFill/>
+        </p:spPr>
+        <p:txBody>
+          <a:bodyPr wrap="square"/>
+          <a:lstStyle/>
+          <a:p>
+            <a:pPr algn="l">
+              <a:defRPr sz="3200" b="1">
+                <a:solidFill>
+                  <a:srgbClr val="22627E"/>
+                </a:solidFill>
+                <a:latin typeface="Calibri"/>
+              </a:defRPr>
+            </a:pPr>
+            <a:r>
+              <a:t>Tokenizacion de activos: regulacion actual</a:t>
+            </a:r>
+          </a:p>
+        </p:txBody>
+      </p:sp>
+      <p:sp>
+        <p:nvSpPr>
+          <p:cNvPr id="4" name="Rectangle 3"/>
+          <p:cNvSpPr/>
+          <p:nvPr/>
+        </p:nvSpPr>
+        <p:spPr>
+          <a:xfrm>
+            <a:off x="457200" y="1051560"/>
+            <a:ext cx="10972800" cy="27432"/>
+          </a:xfrm>
+          <a:prstGeom prst="rect">
+            <a:avLst/>
+          </a:prstGeom>
+          <a:solidFill>
+            <a:srgbClr val="22627E"/>
+          </a:solidFill>
+          <a:ln>
+            <a:noFill/>
+          </a:ln>
+        </p:spPr>
+        <p:style>
+          <a:lnRef idx="1">
+            <a:schemeClr val="accent1"/>
+          </a:lnRef>
+          <a:fillRef idx="3">
+            <a:schemeClr val="accent1"/>
+          </a:fillRef>
+          <a:effectRef idx="2">
+            <a:schemeClr val="accent1"/>
+          </a:effectRef>
+          <a:fontRef idx="minor">
+            <a:schemeClr val="lt1"/>
+          </a:fontRef>
+        </p:style>
+        <p:txBody>
+          <a:bodyPr rtlCol="0" anchor="ctr"/>
+          <a:lstStyle/>
+          <a:p>
+            <a:pPr algn="ctr"/>
+            <a:endParaRPr/>
+          </a:p>
+        </p:txBody>
+      </p:sp>
+      <p:sp>
+        <p:nvSpPr>
+          <p:cNvPr id="5" name="TextBox 4"/>
+          <p:cNvSpPr txBox="1"/>
+          <p:nvPr/>
+        </p:nvSpPr>
+        <p:spPr>
+          <a:xfrm>
+            <a:off x="640080" y="1280160"/>
+            <a:ext cx="10515600" cy="5029200"/>
+          </a:xfrm>
+          <a:prstGeom prst="rect">
+            <a:avLst/>
+          </a:prstGeom>
+          <a:noFill/>
+        </p:spPr>
+        <p:txBody>
+          <a:bodyPr wrap="square">
+            <a:spAutoFit/>
+          </a:bodyPr>
+          <a:lstStyle/>
+          <a:p>
+            <a:pPr>
+              <a:spcAft>
+                <a:spcPts val="800"/>
+              </a:spcAft>
+              <a:defRPr sz="2000">
+                <a:solidFill>
+                  <a:srgbClr val="333333"/>
+                </a:solidFill>
+                <a:latin typeface="Calibri"/>
+              </a:defRPr>
+            </a:pPr>
+            <a:r>
+              <a:t>Si tokenizas un activo real (bono, accion, inmueble) en Fabric:</a:t>
+            </a:r>
+          </a:p>
+          <a:p>
+            <a:pPr>
+              <a:spcAft>
+                <a:spcPts val="800"/>
+              </a:spcAft>
+              <a:defRPr sz="2000">
+                <a:solidFill>
+                  <a:srgbClr val="333333"/>
+                </a:solidFill>
+                <a:latin typeface="Calibri"/>
+              </a:defRPr>
+            </a:pPr>
+            <a:r>
+              <a:t>  El token puede ser un 'valor negociable' segun MiFID II</a:t>
+            </a:r>
+          </a:p>
+          <a:p>
+            <a:pPr>
+              <a:spcAft>
+                <a:spcPts val="800"/>
+              </a:spcAft>
+              <a:defRPr sz="2000">
+                <a:solidFill>
+                  <a:srgbClr val="333333"/>
+                </a:solidFill>
+                <a:latin typeface="Calibri"/>
+              </a:defRPr>
+            </a:pPr>
+            <a:r>
+              <a:t>  Necesitas autorizacion de la CNMV (Espana) o equivalente europeo</a:t>
+            </a:r>
+          </a:p>
+          <a:p>
+            <a:pPr>
+              <a:spcAft>
+                <a:spcPts val="800"/>
+              </a:spcAft>
+              <a:defRPr sz="2000">
+                <a:solidFill>
+                  <a:srgbClr val="333333"/>
+                </a:solidFill>
+                <a:latin typeface="Calibri"/>
+              </a:defRPr>
+            </a:pPr>
+            <a:r>
+              <a:t>  Aplican las mismas reglas que a los valores tradicionales</a:t>
+            </a:r>
+          </a:p>
+          <a:p>
+            <a:pPr>
+              <a:spcAft>
+                <a:spcPts val="800"/>
+              </a:spcAft>
+              <a:defRPr sz="2000">
+                <a:solidFill>
+                  <a:srgbClr val="333333"/>
+                </a:solidFill>
+                <a:latin typeface="Calibri"/>
+              </a:defRPr>
+            </a:pPr>
+            <a:endParaRPr/>
+          </a:p>
+          <a:p>
+            <a:pPr>
+              <a:spcAft>
+                <a:spcPts val="800"/>
+              </a:spcAft>
+              <a:defRPr sz="2000">
+                <a:solidFill>
+                  <a:srgbClr val="333333"/>
+                </a:solidFill>
+                <a:latin typeface="Calibri"/>
+              </a:defRPr>
+            </a:pPr>
+            <a:r>
+              <a:t>Security Token Offerings (STOs): tokenizar + vender al publico</a:t>
+            </a:r>
+          </a:p>
+          <a:p>
+            <a:pPr>
+              <a:spcAft>
+                <a:spcPts val="800"/>
+              </a:spcAft>
+              <a:defRPr sz="2000">
+                <a:solidFill>
+                  <a:srgbClr val="333333"/>
+                </a:solidFill>
+                <a:latin typeface="Calibri"/>
+              </a:defRPr>
+            </a:pPr>
+            <a:r>
+              <a:t>  Mas regulado que una ICO, pero legal y con marco claro</a:t>
+            </a:r>
+          </a:p>
+          <a:p>
+            <a:pPr>
+              <a:spcAft>
+                <a:spcPts val="800"/>
+              </a:spcAft>
+              <a:defRPr sz="2000">
+                <a:solidFill>
+                  <a:srgbClr val="333333"/>
+                </a:solidFill>
+                <a:latin typeface="Calibri"/>
+              </a:defRPr>
+            </a:pPr>
+            <a:r>
+              <a:t>  Ejemplo: Bit2Me STX (autorizado por CNMV bajo regimen sandbox)</a:t>
+            </a:r>
+          </a:p>
+          <a:p>
+            <a:pPr>
+              <a:spcAft>
+                <a:spcPts val="800"/>
+              </a:spcAft>
+              <a:defRPr sz="2000">
+                <a:solidFill>
+                  <a:srgbClr val="333333"/>
+                </a:solidFill>
+                <a:latin typeface="Calibri"/>
+              </a:defRPr>
+            </a:pPr>
+            <a:endParaRPr/>
+          </a:p>
+          <a:p>
+            <a:pPr>
+              <a:spcAft>
+                <a:spcPts val="800"/>
+              </a:spcAft>
+              <a:defRPr sz="2000">
+                <a:solidFill>
+                  <a:srgbClr val="333333"/>
+                </a:solidFill>
+                <a:latin typeface="Calibri"/>
+              </a:defRPr>
+            </a:pPr>
+            <a:r>
+              <a:t>Tokenizacion interna (entre orgs de un consorcio): menos regulacion</a:t>
+            </a:r>
+          </a:p>
+          <a:p>
+            <a:pPr>
+              <a:spcAft>
+                <a:spcPts val="800"/>
+              </a:spcAft>
+              <a:defRPr sz="2000">
+                <a:solidFill>
+                  <a:srgbClr val="333333"/>
+                </a:solidFill>
+                <a:latin typeface="Calibri"/>
+              </a:defRPr>
+            </a:pPr>
+            <a:r>
+              <a:t>  Si los tokens no salen de la red permissioned, MiCA no aplica directamente</a:t>
+            </a:r>
+          </a:p>
+        </p:txBody>
+      </p:sp>
+    </p:spTree>
+  </p:cSld>
+  <p:clrMapOvr>
+    <a:masterClrMapping/>
+  </p:clrMapOvr>
+</p:sld>
+</file>
+
+<file path=ppt/slides/slide6.xml><?xml version="1.0" encoding="utf-8"?>
+<p:sld xmlns:a="http://schemas.openxmlformats.org/drawingml/2006/main" xmlns:r="http://schemas.openxmlformats.org/officeDocument/2006/relationships" xmlns:p="http://schemas.openxmlformats.org/presentationml/2006/main">
+  <p:cSld>
+    <p:spTree>
+      <p:nvGrpSpPr>
+        <p:cNvPr id="1" name=""/>
+        <p:cNvGrpSpPr/>
+        <p:nvPr/>
+      </p:nvGrpSpPr>
+      <p:grpSpPr>
+        <a:xfrm>
+          <a:off x="0" y="0"/>
+          <a:ext cx="0" cy="0"/>
+          <a:chOff x="0" y="0"/>
+          <a:chExt cx="0" cy="0"/>
+        </a:xfrm>
+      </p:grpSpPr>
+      <p:sp>
+        <p:nvSpPr>
+          <p:cNvPr id="2" name="Rectangle 1"/>
+          <p:cNvSpPr/>
+          <p:nvPr/>
+        </p:nvSpPr>
+        <p:spPr>
+          <a:xfrm>
+            <a:off x="0" y="0"/>
+            <a:ext cx="12188952" cy="73152"/>
+          </a:xfrm>
+          <a:prstGeom prst="rect">
+            <a:avLst/>
+          </a:prstGeom>
+          <a:solidFill>
+            <a:srgbClr val="22627E"/>
+          </a:solidFill>
+          <a:ln>
+            <a:noFill/>
+          </a:ln>
+        </p:spPr>
+        <p:style>
+          <a:lnRef idx="1">
+            <a:schemeClr val="accent1"/>
+          </a:lnRef>
+          <a:fillRef idx="3">
+            <a:schemeClr val="accent1"/>
+          </a:fillRef>
+          <a:effectRef idx="2">
+            <a:schemeClr val="accent1"/>
+          </a:effectRef>
+          <a:fontRef idx="minor">
+            <a:schemeClr val="lt1"/>
+          </a:fontRef>
+        </p:style>
+        <p:txBody>
+          <a:bodyPr rtlCol="0" anchor="ctr"/>
+          <a:lstStyle/>
+          <a:p>
+            <a:pPr algn="ctr"/>
+            <a:endParaRPr/>
+          </a:p>
+        </p:txBody>
+      </p:sp>
+      <p:sp>
+        <p:nvSpPr>
+          <p:cNvPr id="3" name="TextBox 2"/>
+          <p:cNvSpPr txBox="1"/>
+          <p:nvPr/>
+        </p:nvSpPr>
+        <p:spPr>
+          <a:xfrm>
+            <a:off x="457200" y="274320"/>
+            <a:ext cx="10972800" cy="731520"/>
+          </a:xfrm>
+          <a:prstGeom prst="rect">
+            <a:avLst/>
+          </a:prstGeom>
+          <a:noFill/>
+        </p:spPr>
+        <p:txBody>
+          <a:bodyPr wrap="square"/>
+          <a:lstStyle/>
+          <a:p>
+            <a:pPr algn="l">
+              <a:defRPr sz="3200" b="1">
+                <a:solidFill>
+                  <a:srgbClr val="22627E"/>
+                </a:solidFill>
+                <a:latin typeface="Calibri"/>
+              </a:defRPr>
+            </a:pPr>
+            <a:r>
+              <a:t>Responsabilidad legal: si el chaincode tiene un bug</a:t>
+            </a:r>
+          </a:p>
+        </p:txBody>
+      </p:sp>
+      <p:sp>
+        <p:nvSpPr>
+          <p:cNvPr id="4" name="Rectangle 3"/>
+          <p:cNvSpPr/>
+          <p:nvPr/>
+        </p:nvSpPr>
+        <p:spPr>
+          <a:xfrm>
+            <a:off x="457200" y="1051560"/>
+            <a:ext cx="10972800" cy="27432"/>
+          </a:xfrm>
+          <a:prstGeom prst="rect">
+            <a:avLst/>
+          </a:prstGeom>
+          <a:solidFill>
+            <a:srgbClr val="22627E"/>
+          </a:solidFill>
+          <a:ln>
+            <a:noFill/>
+          </a:ln>
+        </p:spPr>
+        <p:style>
+          <a:lnRef idx="1">
+            <a:schemeClr val="accent1"/>
+          </a:lnRef>
+          <a:fillRef idx="3">
+            <a:schemeClr val="accent1"/>
+          </a:fillRef>
+          <a:effectRef idx="2">
+            <a:schemeClr val="accent1"/>
+          </a:effectRef>
+          <a:fontRef idx="minor">
+            <a:schemeClr val="lt1"/>
+          </a:fontRef>
+        </p:style>
+        <p:txBody>
+          <a:bodyPr rtlCol="0" anchor="ctr"/>
+          <a:lstStyle/>
+          <a:p>
+            <a:pPr algn="ctr"/>
+            <a:endParaRPr/>
+          </a:p>
+        </p:txBody>
+      </p:sp>
+      <p:sp>
+        <p:nvSpPr>
+          <p:cNvPr id="5" name="TextBox 4"/>
+          <p:cNvSpPr txBox="1"/>
+          <p:nvPr/>
+        </p:nvSpPr>
+        <p:spPr>
+          <a:xfrm>
+            <a:off x="640080" y="1280160"/>
+            <a:ext cx="10515600" cy="5029200"/>
+          </a:xfrm>
+          <a:prstGeom prst="rect">
+            <a:avLst/>
+          </a:prstGeom>
+          <a:noFill/>
+        </p:spPr>
+        <p:txBody>
+          <a:bodyPr wrap="square">
+            <a:spAutoFit/>
+          </a:bodyPr>
+          <a:lstStyle/>
+          <a:p>
+            <a:pPr>
+              <a:spcAft>
+                <a:spcPts val="800"/>
+              </a:spcAft>
+              <a:defRPr sz="2000">
+                <a:solidFill>
+                  <a:srgbClr val="333333"/>
+                </a:solidFill>
+                <a:latin typeface="Calibri"/>
+              </a:defRPr>
+            </a:pPr>
+            <a:r>
               <a:t>¿Quien responde si un chaincode transfiere fondos incorrectamente?</a:t>
             </a:r>
           </a:p>
@@ -4837,6 +6356,7 @@
                 <a:latin typeface="Calibri"/>
               </a:defRPr>
             </a:pPr>
+            <a:endParaRPr/>
           </a:p>
           <a:p>
             <a:pPr>
@@ -4914,6 +6434,7 @@
                 <a:latin typeface="Calibri"/>
               </a:defRPr>
             </a:pPr>
+            <a:endParaRPr/>
           </a:p>
           <a:p>
             <a:pPr>
@@ -5006,7 +6527,7 @@
 </file>
 
 <file path=ppt/slides/slide7.xml><?xml version="1.0" encoding="utf-8"?>
-<p:sld xmlns:a="http://schemas.openxmlformats.org/drawingml/2006/main" xmlns:p="http://schemas.openxmlformats.org/presentationml/2006/main" xmlns:r="http://schemas.openxmlformats.org/officeDocument/2006/relationships">
+<p:sld xmlns:a="http://schemas.openxmlformats.org/drawingml/2006/main" xmlns:r="http://schemas.openxmlformats.org/officeDocument/2006/relationships" xmlns:p="http://schemas.openxmlformats.org/presentationml/2006/main">
   <p:cSld>
     <p:spTree>
       <p:nvGrpSpPr>
@@ -5014,7 +6535,14 @@
         <p:cNvGrpSpPr/>
         <p:nvPr/>
       </p:nvGrpSpPr>
-      <p:grpSpPr/>
+      <p:grpSpPr>
+        <a:xfrm>
+          <a:off x="0" y="0"/>
+          <a:ext cx="0" cy="0"/>
+          <a:chOff x="0" y="0"/>
+          <a:chExt cx="0" cy="0"/>
+        </a:xfrm>
+      </p:grpSpPr>
       <p:sp>
         <p:nvSpPr>
           <p:cNvPr id="2" name="Rectangle 1"/>
@@ -5055,6 +6583,7 @@
           <a:lstStyle/>
           <a:p>
             <a:pPr algn="ctr"/>
+            <a:endParaRPr/>
           </a:p>
         </p:txBody>
       </p:sp>
@@ -5098,6 +6627,7 @@
           <a:lstStyle/>
           <a:p>
             <a:pPr algn="ctr"/>
+            <a:endParaRPr/>
           </a:p>
         </p:txBody>
       </p:sp>
@@ -5209,6 +6739,7 @@
           <a:lstStyle/>
           <a:p>
             <a:pPr algn="ctr"/>
+            <a:endParaRPr/>
           </a:p>
         </p:txBody>
       </p:sp>
@@ -5324,7 +6855,7 @@
 </file>
 
 <file path=ppt/slides/slide8.xml><?xml version="1.0" encoding="utf-8"?>
-<p:sld xmlns:a="http://schemas.openxmlformats.org/drawingml/2006/main" xmlns:p="http://schemas.openxmlformats.org/presentationml/2006/main" xmlns:r="http://schemas.openxmlformats.org/officeDocument/2006/relationships">
+<p:sld xmlns:a="http://schemas.openxmlformats.org/drawingml/2006/main" xmlns:r="http://schemas.openxmlformats.org/officeDocument/2006/relationships" xmlns:p="http://schemas.openxmlformats.org/presentationml/2006/main">
   <p:cSld>
     <p:spTree>
       <p:nvGrpSpPr>
@@ -5332,7 +6863,14 @@
         <p:cNvGrpSpPr/>
         <p:nvPr/>
       </p:nvGrpSpPr>
-      <p:grpSpPr/>
+      <p:grpSpPr>
+        <a:xfrm>
+          <a:off x="0" y="0"/>
+          <a:ext cx="0" cy="0"/>
+          <a:chOff x="0" y="0"/>
+          <a:chExt cx="0" cy="0"/>
+        </a:xfrm>
+      </p:grpSpPr>
       <p:sp>
         <p:nvSpPr>
           <p:cNvPr id="2" name="Rectangle 1"/>
@@ -5373,6 +6911,7 @@
           <a:lstStyle/>
           <a:p>
             <a:pPr algn="ctr"/>
+            <a:endParaRPr/>
           </a:p>
         </p:txBody>
       </p:sp>
@@ -5416,6 +6955,7 @@
           <a:lstStyle/>
           <a:p>
             <a:pPr algn="ctr"/>
+            <a:endParaRPr/>
           </a:p>
         </p:txBody>
       </p:sp>
@@ -5527,6 +7067,7 @@
           <a:lstStyle/>
           <a:p>
             <a:pPr algn="ctr"/>
+            <a:endParaRPr/>
           </a:p>
         </p:txBody>
       </p:sp>
@@ -5595,6 +7136,7 @@
                 <a:latin typeface="Calibri"/>
               </a:defRPr>
             </a:pPr>
+            <a:endParaRPr/>
           </a:p>
           <a:p>
             <a:pPr>
@@ -5672,6 +7214,7 @@
                 <a:latin typeface="Calibri"/>
               </a:defRPr>
             </a:pPr>
+            <a:endParaRPr/>
           </a:p>
           <a:p>
             <a:pPr>
@@ -5716,7 +7259,7 @@
 </file>
 
 <file path=ppt/slides/slide9.xml><?xml version="1.0" encoding="utf-8"?>
-<p:sld xmlns:a="http://schemas.openxmlformats.org/drawingml/2006/main" xmlns:p="http://schemas.openxmlformats.org/presentationml/2006/main" xmlns:r="http://schemas.openxmlformats.org/officeDocument/2006/relationships">
+<p:sld xmlns:a="http://schemas.openxmlformats.org/drawingml/2006/main" xmlns:r="http://schemas.openxmlformats.org/officeDocument/2006/relationships" xmlns:p="http://schemas.openxmlformats.org/presentationml/2006/main">
   <p:cSld>
     <p:spTree>
       <p:nvGrpSpPr>
@@ -5724,7 +7267,14 @@
         <p:cNvGrpSpPr/>
         <p:nvPr/>
       </p:nvGrpSpPr>
-      <p:grpSpPr/>
+      <p:grpSpPr>
+        <a:xfrm>
+          <a:off x="0" y="0"/>
+          <a:ext cx="0" cy="0"/>
+          <a:chOff x="0" y="0"/>
+          <a:chExt cx="0" cy="0"/>
+        </a:xfrm>
+      </p:grpSpPr>
       <p:sp>
         <p:nvSpPr>
           <p:cNvPr id="2" name="Rectangle 1"/>
@@ -5765,6 +7315,7 @@
           <a:lstStyle/>
           <a:p>
             <a:pPr algn="ctr"/>
+            <a:endParaRPr/>
           </a:p>
         </p:txBody>
       </p:sp>
@@ -5842,6 +7393,7 @@
           <a:lstStyle/>
           <a:p>
             <a:pPr algn="ctr"/>
+            <a:endParaRPr/>
           </a:p>
         </p:txBody>
       </p:sp>
